--- a/Weather App Project.pptx
+++ b/Weather App Project.pptx
@@ -5,7 +5,7 @@
     <p:sldMasterId id="2147483659" r:id="rId1"/>
   </p:sldMasterIdLst>
   <p:notesMasterIdLst>
-    <p:notesMasterId r:id="rId12"/>
+    <p:notesMasterId r:id="rId8"/>
   </p:notesMasterIdLst>
   <p:sldIdLst>
     <p:sldId id="256" r:id="rId2"/>
@@ -14,27 +14,23 @@
     <p:sldId id="259" r:id="rId5"/>
     <p:sldId id="260" r:id="rId6"/>
     <p:sldId id="261" r:id="rId7"/>
-    <p:sldId id="262" r:id="rId8"/>
-    <p:sldId id="263" r:id="rId9"/>
-    <p:sldId id="264" r:id="rId10"/>
-    <p:sldId id="265" r:id="rId11"/>
   </p:sldIdLst>
   <p:sldSz cx="12192000" cy="6858000"/>
   <p:notesSz cx="6858000" cy="9144000"/>
   <p:embeddedFontLst>
     <p:embeddedFont>
       <p:font typeface="Inter" panose="020B0604020202020204" charset="0"/>
+      <p:regular r:id="rId9"/>
+      <p:bold r:id="rId10"/>
+      <p:italic r:id="rId11"/>
+      <p:boldItalic r:id="rId12"/>
+    </p:embeddedFont>
+    <p:embeddedFont>
+      <p:font typeface="Poppins" panose="00000500000000000000" pitchFamily="2" charset="0"/>
       <p:regular r:id="rId13"/>
       <p:bold r:id="rId14"/>
       <p:italic r:id="rId15"/>
       <p:boldItalic r:id="rId16"/>
-    </p:embeddedFont>
-    <p:embeddedFont>
-      <p:font typeface="Poppins" panose="00000500000000000000" pitchFamily="2" charset="0"/>
-      <p:regular r:id="rId17"/>
-      <p:bold r:id="rId18"/>
-      <p:italic r:id="rId19"/>
-      <p:boldItalic r:id="rId20"/>
     </p:embeddedFont>
   </p:embeddedFontLst>
   <p:defaultTextStyle>
@@ -830,110 +826,6 @@
 </p:notes>
 </file>
 
-<file path=ppt/notesSlides/notesSlide10.xml><?xml version="1.0" encoding="utf-8"?>
-<p:notes xmlns:a="http://schemas.openxmlformats.org/drawingml/2006/main" xmlns:r="http://schemas.openxmlformats.org/officeDocument/2006/relationships" xmlns:p="http://schemas.openxmlformats.org/presentationml/2006/main" showMasterSp="0" showMasterPhAnim="0">
-  <p:cSld>
-    <p:spTree>
-      <p:nvGrpSpPr>
-        <p:cNvPr id="1" name="Shape 250"/>
-        <p:cNvGrpSpPr/>
-        <p:nvPr/>
-      </p:nvGrpSpPr>
-      <p:grpSpPr>
-        <a:xfrm>
-          <a:off x="0" y="0"/>
-          <a:ext cx="0" cy="0"/>
-          <a:chOff x="0" y="0"/>
-          <a:chExt cx="0" cy="0"/>
-        </a:xfrm>
-      </p:grpSpPr>
-      <p:sp>
-        <p:nvSpPr>
-          <p:cNvPr id="251" name="Google Shape;251;p10:notes"/>
-          <p:cNvSpPr txBox="1">
-            <a:spLocks noGrp="1"/>
-          </p:cNvSpPr>
-          <p:nvPr>
-            <p:ph type="body" idx="1"/>
-          </p:nvPr>
-        </p:nvSpPr>
-        <p:spPr>
-          <a:xfrm>
-            <a:off x="685800" y="4343400"/>
-            <a:ext cx="5486400" cy="4114800"/>
-          </a:xfrm>
-          <a:prstGeom prst="rect">
-            <a:avLst/>
-          </a:prstGeom>
-        </p:spPr>
-        <p:txBody>
-          <a:bodyPr spcFirstLastPara="1" wrap="square" lIns="91425" tIns="91425" rIns="91425" bIns="91425" anchor="t" anchorCtr="0">
-            <a:noAutofit/>
-          </a:bodyPr>
-          <a:lstStyle/>
-          <a:p>
-            <a:pPr marL="0" lvl="0" indent="0" algn="l" rtl="0">
-              <a:spcBef>
-                <a:spcPts val="0"/>
-              </a:spcBef>
-              <a:spcAft>
-                <a:spcPts val="0"/>
-              </a:spcAft>
-              <a:buNone/>
-            </a:pPr>
-            <a:endParaRPr/>
-          </a:p>
-        </p:txBody>
-      </p:sp>
-      <p:sp>
-        <p:nvSpPr>
-          <p:cNvPr id="252" name="Google Shape;252;p10:notes"/>
-          <p:cNvSpPr>
-            <a:spLocks noGrp="1" noRot="1" noChangeAspect="1"/>
-          </p:cNvSpPr>
-          <p:nvPr>
-            <p:ph type="sldImg" idx="2"/>
-          </p:nvPr>
-        </p:nvSpPr>
-        <p:spPr>
-          <a:xfrm>
-            <a:off x="1143225" y="685800"/>
-            <a:ext cx="4572225" cy="3429000"/>
-          </a:xfrm>
-          <a:custGeom>
-            <a:avLst/>
-            <a:gdLst/>
-            <a:ahLst/>
-            <a:cxnLst/>
-            <a:rect l="l" t="t" r="r" b="b"/>
-            <a:pathLst>
-              <a:path w="120000" h="120000" extrusionOk="0">
-                <a:moveTo>
-                  <a:pt x="0" y="0"/>
-                </a:moveTo>
-                <a:lnTo>
-                  <a:pt x="120000" y="0"/>
-                </a:lnTo>
-                <a:lnTo>
-                  <a:pt x="120000" y="120000"/>
-                </a:lnTo>
-                <a:lnTo>
-                  <a:pt x="0" y="120000"/>
-                </a:lnTo>
-                <a:close/>
-              </a:path>
-            </a:pathLst>
-          </a:custGeom>
-        </p:spPr>
-      </p:sp>
-    </p:spTree>
-  </p:cSld>
-  <p:clrMapOvr>
-    <a:masterClrMapping/>
-  </p:clrMapOvr>
-</p:notes>
-</file>
-
 <file path=ppt/notesSlides/notesSlide2.xml><?xml version="1.0" encoding="utf-8"?>
 <p:notes xmlns:a="http://schemas.openxmlformats.org/drawingml/2006/main" xmlns:r="http://schemas.openxmlformats.org/officeDocument/2006/relationships" xmlns:p="http://schemas.openxmlformats.org/presentationml/2006/main" showMasterSp="0" showMasterPhAnim="0">
   <p:cSld>
@@ -1001,8 +893,8 @@
         </p:nvSpPr>
         <p:spPr>
           <a:xfrm>
-            <a:off x="1143225" y="685800"/>
-            <a:ext cx="4572225" cy="3429000"/>
+            <a:off x="381000" y="685800"/>
+            <a:ext cx="6096000" cy="3429000"/>
           </a:xfrm>
           <a:custGeom>
             <a:avLst/>
@@ -1105,8 +997,8 @@
         </p:nvSpPr>
         <p:spPr>
           <a:xfrm>
-            <a:off x="1143225" y="685800"/>
-            <a:ext cx="4572225" cy="3429000"/>
+            <a:off x="381000" y="685800"/>
+            <a:ext cx="6096000" cy="3429000"/>
           </a:xfrm>
           <a:custGeom>
             <a:avLst/>
@@ -1209,8 +1101,8 @@
         </p:nvSpPr>
         <p:spPr>
           <a:xfrm>
-            <a:off x="1143225" y="685800"/>
-            <a:ext cx="4572225" cy="3429000"/>
+            <a:off x="381000" y="685800"/>
+            <a:ext cx="6096000" cy="3429000"/>
           </a:xfrm>
           <a:custGeom>
             <a:avLst/>
@@ -1417,320 +1309,8 @@
         </p:nvSpPr>
         <p:spPr>
           <a:xfrm>
-            <a:off x="1143225" y="685800"/>
-            <a:ext cx="4572225" cy="3429000"/>
-          </a:xfrm>
-          <a:custGeom>
-            <a:avLst/>
-            <a:gdLst/>
-            <a:ahLst/>
-            <a:cxnLst/>
-            <a:rect l="l" t="t" r="r" b="b"/>
-            <a:pathLst>
-              <a:path w="120000" h="120000" extrusionOk="0">
-                <a:moveTo>
-                  <a:pt x="0" y="0"/>
-                </a:moveTo>
-                <a:lnTo>
-                  <a:pt x="120000" y="0"/>
-                </a:lnTo>
-                <a:lnTo>
-                  <a:pt x="120000" y="120000"/>
-                </a:lnTo>
-                <a:lnTo>
-                  <a:pt x="0" y="120000"/>
-                </a:lnTo>
-                <a:close/>
-              </a:path>
-            </a:pathLst>
-          </a:custGeom>
-        </p:spPr>
-      </p:sp>
-    </p:spTree>
-  </p:cSld>
-  <p:clrMapOvr>
-    <a:masterClrMapping/>
-  </p:clrMapOvr>
-</p:notes>
-</file>
-
-<file path=ppt/notesSlides/notesSlide7.xml><?xml version="1.0" encoding="utf-8"?>
-<p:notes xmlns:a="http://schemas.openxmlformats.org/drawingml/2006/main" xmlns:r="http://schemas.openxmlformats.org/officeDocument/2006/relationships" xmlns:p="http://schemas.openxmlformats.org/presentationml/2006/main" showMasterSp="0" showMasterPhAnim="0">
-  <p:cSld>
-    <p:spTree>
-      <p:nvGrpSpPr>
-        <p:cNvPr id="1" name="Shape 192"/>
-        <p:cNvGrpSpPr/>
-        <p:nvPr/>
-      </p:nvGrpSpPr>
-      <p:grpSpPr>
-        <a:xfrm>
-          <a:off x="0" y="0"/>
-          <a:ext cx="0" cy="0"/>
-          <a:chOff x="0" y="0"/>
-          <a:chExt cx="0" cy="0"/>
-        </a:xfrm>
-      </p:grpSpPr>
-      <p:sp>
-        <p:nvSpPr>
-          <p:cNvPr id="193" name="Google Shape;193;p7:notes"/>
-          <p:cNvSpPr txBox="1">
-            <a:spLocks noGrp="1"/>
-          </p:cNvSpPr>
-          <p:nvPr>
-            <p:ph type="body" idx="1"/>
-          </p:nvPr>
-        </p:nvSpPr>
-        <p:spPr>
-          <a:xfrm>
-            <a:off x="685800" y="4343400"/>
-            <a:ext cx="5486400" cy="4114800"/>
-          </a:xfrm>
-          <a:prstGeom prst="rect">
-            <a:avLst/>
-          </a:prstGeom>
-        </p:spPr>
-        <p:txBody>
-          <a:bodyPr spcFirstLastPara="1" wrap="square" lIns="91425" tIns="91425" rIns="91425" bIns="91425" anchor="t" anchorCtr="0">
-            <a:noAutofit/>
-          </a:bodyPr>
-          <a:lstStyle/>
-          <a:p>
-            <a:pPr marL="0" lvl="0" indent="0" algn="l" rtl="0">
-              <a:spcBef>
-                <a:spcPts val="0"/>
-              </a:spcBef>
-              <a:spcAft>
-                <a:spcPts val="0"/>
-              </a:spcAft>
-              <a:buNone/>
-            </a:pPr>
-            <a:endParaRPr/>
-          </a:p>
-        </p:txBody>
-      </p:sp>
-      <p:sp>
-        <p:nvSpPr>
-          <p:cNvPr id="194" name="Google Shape;194;p7:notes"/>
-          <p:cNvSpPr>
-            <a:spLocks noGrp="1" noRot="1" noChangeAspect="1"/>
-          </p:cNvSpPr>
-          <p:nvPr>
-            <p:ph type="sldImg" idx="2"/>
-          </p:nvPr>
-        </p:nvSpPr>
-        <p:spPr>
-          <a:xfrm>
-            <a:off x="1143225" y="685800"/>
-            <a:ext cx="4572225" cy="3429000"/>
-          </a:xfrm>
-          <a:custGeom>
-            <a:avLst/>
-            <a:gdLst/>
-            <a:ahLst/>
-            <a:cxnLst/>
-            <a:rect l="l" t="t" r="r" b="b"/>
-            <a:pathLst>
-              <a:path w="120000" h="120000" extrusionOk="0">
-                <a:moveTo>
-                  <a:pt x="0" y="0"/>
-                </a:moveTo>
-                <a:lnTo>
-                  <a:pt x="120000" y="0"/>
-                </a:lnTo>
-                <a:lnTo>
-                  <a:pt x="120000" y="120000"/>
-                </a:lnTo>
-                <a:lnTo>
-                  <a:pt x="0" y="120000"/>
-                </a:lnTo>
-                <a:close/>
-              </a:path>
-            </a:pathLst>
-          </a:custGeom>
-        </p:spPr>
-      </p:sp>
-    </p:spTree>
-  </p:cSld>
-  <p:clrMapOvr>
-    <a:masterClrMapping/>
-  </p:clrMapOvr>
-</p:notes>
-</file>
-
-<file path=ppt/notesSlides/notesSlide8.xml><?xml version="1.0" encoding="utf-8"?>
-<p:notes xmlns:a="http://schemas.openxmlformats.org/drawingml/2006/main" xmlns:r="http://schemas.openxmlformats.org/officeDocument/2006/relationships" xmlns:p="http://schemas.openxmlformats.org/presentationml/2006/main" showMasterSp="0" showMasterPhAnim="0">
-  <p:cSld>
-    <p:spTree>
-      <p:nvGrpSpPr>
-        <p:cNvPr id="1" name="Shape 210"/>
-        <p:cNvGrpSpPr/>
-        <p:nvPr/>
-      </p:nvGrpSpPr>
-      <p:grpSpPr>
-        <a:xfrm>
-          <a:off x="0" y="0"/>
-          <a:ext cx="0" cy="0"/>
-          <a:chOff x="0" y="0"/>
-          <a:chExt cx="0" cy="0"/>
-        </a:xfrm>
-      </p:grpSpPr>
-      <p:sp>
-        <p:nvSpPr>
-          <p:cNvPr id="211" name="Google Shape;211;p8:notes"/>
-          <p:cNvSpPr txBox="1">
-            <a:spLocks noGrp="1"/>
-          </p:cNvSpPr>
-          <p:nvPr>
-            <p:ph type="body" idx="1"/>
-          </p:nvPr>
-        </p:nvSpPr>
-        <p:spPr>
-          <a:xfrm>
-            <a:off x="685800" y="4343400"/>
-            <a:ext cx="5486400" cy="4114800"/>
-          </a:xfrm>
-          <a:prstGeom prst="rect">
-            <a:avLst/>
-          </a:prstGeom>
-        </p:spPr>
-        <p:txBody>
-          <a:bodyPr spcFirstLastPara="1" wrap="square" lIns="91425" tIns="91425" rIns="91425" bIns="91425" anchor="t" anchorCtr="0">
-            <a:noAutofit/>
-          </a:bodyPr>
-          <a:lstStyle/>
-          <a:p>
-            <a:pPr marL="0" lvl="0" indent="0" algn="l" rtl="0">
-              <a:spcBef>
-                <a:spcPts val="0"/>
-              </a:spcBef>
-              <a:spcAft>
-                <a:spcPts val="0"/>
-              </a:spcAft>
-              <a:buNone/>
-            </a:pPr>
-            <a:endParaRPr/>
-          </a:p>
-        </p:txBody>
-      </p:sp>
-      <p:sp>
-        <p:nvSpPr>
-          <p:cNvPr id="212" name="Google Shape;212;p8:notes"/>
-          <p:cNvSpPr>
-            <a:spLocks noGrp="1" noRot="1" noChangeAspect="1"/>
-          </p:cNvSpPr>
-          <p:nvPr>
-            <p:ph type="sldImg" idx="2"/>
-          </p:nvPr>
-        </p:nvSpPr>
-        <p:spPr>
-          <a:xfrm>
-            <a:off x="1143225" y="685800"/>
-            <a:ext cx="4572225" cy="3429000"/>
-          </a:xfrm>
-          <a:custGeom>
-            <a:avLst/>
-            <a:gdLst/>
-            <a:ahLst/>
-            <a:cxnLst/>
-            <a:rect l="l" t="t" r="r" b="b"/>
-            <a:pathLst>
-              <a:path w="120000" h="120000" extrusionOk="0">
-                <a:moveTo>
-                  <a:pt x="0" y="0"/>
-                </a:moveTo>
-                <a:lnTo>
-                  <a:pt x="120000" y="0"/>
-                </a:lnTo>
-                <a:lnTo>
-                  <a:pt x="120000" y="120000"/>
-                </a:lnTo>
-                <a:lnTo>
-                  <a:pt x="0" y="120000"/>
-                </a:lnTo>
-                <a:close/>
-              </a:path>
-            </a:pathLst>
-          </a:custGeom>
-        </p:spPr>
-      </p:sp>
-    </p:spTree>
-  </p:cSld>
-  <p:clrMapOvr>
-    <a:masterClrMapping/>
-  </p:clrMapOvr>
-</p:notes>
-</file>
-
-<file path=ppt/notesSlides/notesSlide9.xml><?xml version="1.0" encoding="utf-8"?>
-<p:notes xmlns:a="http://schemas.openxmlformats.org/drawingml/2006/main" xmlns:r="http://schemas.openxmlformats.org/officeDocument/2006/relationships" xmlns:p="http://schemas.openxmlformats.org/presentationml/2006/main" showMasterSp="0" showMasterPhAnim="0">
-  <p:cSld>
-    <p:spTree>
-      <p:nvGrpSpPr>
-        <p:cNvPr id="1" name="Shape 232"/>
-        <p:cNvGrpSpPr/>
-        <p:nvPr/>
-      </p:nvGrpSpPr>
-      <p:grpSpPr>
-        <a:xfrm>
-          <a:off x="0" y="0"/>
-          <a:ext cx="0" cy="0"/>
-          <a:chOff x="0" y="0"/>
-          <a:chExt cx="0" cy="0"/>
-        </a:xfrm>
-      </p:grpSpPr>
-      <p:sp>
-        <p:nvSpPr>
-          <p:cNvPr id="233" name="Google Shape;233;p9:notes"/>
-          <p:cNvSpPr txBox="1">
-            <a:spLocks noGrp="1"/>
-          </p:cNvSpPr>
-          <p:nvPr>
-            <p:ph type="body" idx="1"/>
-          </p:nvPr>
-        </p:nvSpPr>
-        <p:spPr>
-          <a:xfrm>
-            <a:off x="685800" y="4343400"/>
-            <a:ext cx="5486400" cy="4114800"/>
-          </a:xfrm>
-          <a:prstGeom prst="rect">
-            <a:avLst/>
-          </a:prstGeom>
-        </p:spPr>
-        <p:txBody>
-          <a:bodyPr spcFirstLastPara="1" wrap="square" lIns="91425" tIns="91425" rIns="91425" bIns="91425" anchor="t" anchorCtr="0">
-            <a:noAutofit/>
-          </a:bodyPr>
-          <a:lstStyle/>
-          <a:p>
-            <a:pPr marL="0" lvl="0" indent="0" algn="l" rtl="0">
-              <a:spcBef>
-                <a:spcPts val="0"/>
-              </a:spcBef>
-              <a:spcAft>
-                <a:spcPts val="0"/>
-              </a:spcAft>
-              <a:buNone/>
-            </a:pPr>
-            <a:endParaRPr/>
-          </a:p>
-        </p:txBody>
-      </p:sp>
-      <p:sp>
-        <p:nvSpPr>
-          <p:cNvPr id="234" name="Google Shape;234;p9:notes"/>
-          <p:cNvSpPr>
-            <a:spLocks noGrp="1" noRot="1" noChangeAspect="1"/>
-          </p:cNvSpPr>
-          <p:nvPr>
-            <p:ph type="sldImg" idx="2"/>
-          </p:nvPr>
-        </p:nvSpPr>
-        <p:spPr>
-          <a:xfrm>
-            <a:off x="1143225" y="685800"/>
-            <a:ext cx="4572225" cy="3429000"/>
+            <a:off x="381000" y="685800"/>
+            <a:ext cx="6096000" cy="3429000"/>
           </a:xfrm>
           <a:custGeom>
             <a:avLst/>
@@ -11614,33 +11194,6 @@
           <a:chExt cx="0" cy="0"/>
         </a:xfrm>
       </p:grpSpPr>
-      <p:pic>
-        <p:nvPicPr>
-          <p:cNvPr id="84" name="Google Shape;84;p13" descr="image.png"/>
-          <p:cNvPicPr preferRelativeResize="0"/>
-          <p:nvPr/>
-        </p:nvPicPr>
-        <p:blipFill rotWithShape="1">
-          <a:blip r:embed="rId3">
-            <a:alphaModFix/>
-          </a:blip>
-          <a:srcRect/>
-          <a:stretch/>
-        </p:blipFill>
-        <p:spPr>
-          <a:xfrm>
-            <a:off x="3064275" y="4203604"/>
-            <a:ext cx="6063449" cy="567898"/>
-          </a:xfrm>
-          <a:prstGeom prst="rect">
-            <a:avLst/>
-          </a:prstGeom>
-          <a:noFill/>
-          <a:ln>
-            <a:noFill/>
-          </a:ln>
-        </p:spPr>
-      </p:pic>
       <p:sp>
         <p:nvSpPr>
           <p:cNvPr id="85" name="Google Shape;85;p13"/>
@@ -11744,7 +11297,7 @@
               <a:buNone/>
             </a:pPr>
             <a:r>
-              <a:rPr lang="en-US" sz="1800" b="0" i="0" u="none" strike="noStrike" cap="none">
+              <a:rPr lang="en-US" sz="1800" b="0" i="0" u="none" strike="noStrike" cap="none" dirty="0">
                 <a:solidFill>
                   <a:srgbClr val="CBD5E1"/>
                 </a:solidFill>
@@ -11755,20 +11308,26 @@
               </a:rPr>
               <a:t>A modern, reactive weather and air quality monitoring application built natively for Android.</a:t>
             </a:r>
-            <a:endParaRPr/>
+            <a:endParaRPr dirty="0"/>
           </a:p>
         </p:txBody>
       </p:sp>
       <p:sp>
         <p:nvSpPr>
-          <p:cNvPr id="87" name="Google Shape;87;p13"/>
+          <p:cNvPr id="2" name="Google Shape;86;p13">
+            <a:extLst>
+              <a:ext uri="{FF2B5EF4-FFF2-40B4-BE49-F238E27FC236}">
+                <a16:creationId xmlns:a16="http://schemas.microsoft.com/office/drawing/2014/main" id="{7D9C794C-F94C-4824-F851-2497238E47A0}"/>
+              </a:ext>
+            </a:extLst>
+          </p:cNvPr>
           <p:cNvSpPr txBox="1"/>
           <p:nvPr/>
         </p:nvSpPr>
         <p:spPr>
           <a:xfrm>
-            <a:off x="5048250" y="4258567"/>
-            <a:ext cx="1047750" cy="830997"/>
+            <a:off x="1029049" y="4526315"/>
+            <a:ext cx="7317996" cy="323165"/>
           </a:xfrm>
           <a:prstGeom prst="rect">
             <a:avLst/>
@@ -11784,7 +11343,10 @@
           </a:bodyPr>
           <a:lstStyle/>
           <a:p>
-            <a:pPr marL="0" marR="0" lvl="0" indent="0" rtl="0">
+            <a:pPr marL="0" marR="0" lvl="0" indent="0" algn="ctr" rtl="0">
+              <a:lnSpc>
+                <a:spcPct val="150000"/>
+              </a:lnSpc>
               <a:spcBef>
                 <a:spcPts val="0"/>
               </a:spcBef>
@@ -11794,302 +11356,7 @@
               <a:buNone/>
             </a:pPr>
             <a:r>
-              <a:rPr lang="en-US" sz="1350" b="1" dirty="0">
-                <a:solidFill>
-                  <a:srgbClr val="94A3B8"/>
-                </a:solidFill>
-                <a:latin typeface="Inter"/>
-                <a:ea typeface="Inter"/>
-                <a:sym typeface="Inter"/>
-              </a:rPr>
-              <a:t>Liran Cordova, Or Rodrigez, Or Zuka</a:t>
-            </a:r>
-            <a:endParaRPr dirty="0"/>
-          </a:p>
-        </p:txBody>
-      </p:sp>
-      <p:sp>
-        <p:nvSpPr>
-          <p:cNvPr id="88" name="Google Shape;88;p13"/>
-          <p:cNvSpPr txBox="1"/>
-          <p:nvPr/>
-        </p:nvSpPr>
-        <p:spPr>
-          <a:xfrm>
-            <a:off x="6986587" y="4334767"/>
-            <a:ext cx="1190625" cy="200025"/>
-          </a:xfrm>
-          <a:prstGeom prst="rect">
-            <a:avLst/>
-          </a:prstGeom>
-          <a:noFill/>
-          <a:ln>
-            <a:noFill/>
-          </a:ln>
-        </p:spPr>
-        <p:txBody>
-          <a:bodyPr spcFirstLastPara="1" wrap="square" lIns="0" tIns="0" rIns="0" bIns="0" anchor="t" anchorCtr="0">
-            <a:spAutoFit/>
-          </a:bodyPr>
-          <a:lstStyle/>
-          <a:p>
-            <a:pPr marL="0" marR="0" lvl="0" indent="0" algn="ctr" rtl="0">
-              <a:spcBef>
-                <a:spcPts val="0"/>
-              </a:spcBef>
-              <a:spcAft>
-                <a:spcPts val="0"/>
-              </a:spcAft>
-              <a:buNone/>
-            </a:pPr>
-            <a:r>
-              <a:rPr lang="en-US" sz="1350" b="1" i="0" u="none" strike="noStrike" cap="none">
-                <a:solidFill>
-                  <a:srgbClr val="94A3B8"/>
-                </a:solidFill>
-                <a:latin typeface="Inter"/>
-                <a:ea typeface="Inter"/>
-                <a:cs typeface="Inter"/>
-                <a:sym typeface="Inter"/>
-              </a:rPr>
-              <a:t>[Current Date]</a:t>
-            </a:r>
-            <a:endParaRPr/>
-          </a:p>
-        </p:txBody>
-      </p:sp>
-    </p:spTree>
-  </p:cSld>
-  <p:clrMapOvr>
-    <a:masterClrMapping/>
-  </p:clrMapOvr>
-</p:sld>
-</file>
-
-<file path=ppt/slides/slide10.xml><?xml version="1.0" encoding="utf-8"?>
-<p:sld xmlns:a="http://schemas.openxmlformats.org/drawingml/2006/main" xmlns:r="http://schemas.openxmlformats.org/officeDocument/2006/relationships" xmlns:p="http://schemas.openxmlformats.org/presentationml/2006/main">
-  <p:cSld>
-    <p:bg>
-      <p:bgPr>
-        <a:solidFill>
-          <a:srgbClr val="0F172A"/>
-        </a:solidFill>
-        <a:effectLst/>
-      </p:bgPr>
-    </p:bg>
-    <p:spTree>
-      <p:nvGrpSpPr>
-        <p:cNvPr id="1" name="Shape 253"/>
-        <p:cNvGrpSpPr/>
-        <p:nvPr/>
-      </p:nvGrpSpPr>
-      <p:grpSpPr>
-        <a:xfrm>
-          <a:off x="0" y="0"/>
-          <a:ext cx="0" cy="0"/>
-          <a:chOff x="0" y="0"/>
-          <a:chExt cx="0" cy="0"/>
-        </a:xfrm>
-      </p:grpSpPr>
-      <p:pic>
-        <p:nvPicPr>
-          <p:cNvPr id="254" name="Google Shape;254;p22"/>
-          <p:cNvPicPr preferRelativeResize="0"/>
-          <p:nvPr/>
-        </p:nvPicPr>
-        <p:blipFill rotWithShape="1">
-          <a:blip r:embed="rId3">
-            <a:alphaModFix/>
-          </a:blip>
-          <a:srcRect t="6754" b="6763"/>
-          <a:stretch/>
-        </p:blipFill>
-        <p:spPr>
-          <a:xfrm>
-            <a:off x="6334125" y="1724025"/>
-            <a:ext cx="5286374" cy="4572000"/>
-          </a:xfrm>
-          <a:prstGeom prst="rect">
-            <a:avLst/>
-          </a:prstGeom>
-          <a:noFill/>
-          <a:ln>
-            <a:noFill/>
-          </a:ln>
-        </p:spPr>
-      </p:pic>
-      <p:sp>
-        <p:nvSpPr>
-          <p:cNvPr id="255" name="Google Shape;255;p22"/>
-          <p:cNvSpPr txBox="1"/>
-          <p:nvPr/>
-        </p:nvSpPr>
-        <p:spPr>
-          <a:xfrm>
-            <a:off x="539625" y="285484"/>
-            <a:ext cx="11601600" cy="507900"/>
-          </a:xfrm>
-          <a:prstGeom prst="rect">
-            <a:avLst/>
-          </a:prstGeom>
-          <a:noFill/>
-          <a:ln>
-            <a:noFill/>
-          </a:ln>
-        </p:spPr>
-        <p:txBody>
-          <a:bodyPr spcFirstLastPara="1" wrap="square" lIns="0" tIns="0" rIns="0" bIns="0" anchor="t" anchorCtr="0">
-            <a:spAutoFit/>
-          </a:bodyPr>
-          <a:lstStyle/>
-          <a:p>
-            <a:pPr marL="0" marR="0" lvl="0" indent="0" algn="l" rtl="0">
-              <a:spcBef>
-                <a:spcPts val="0"/>
-              </a:spcBef>
-              <a:spcAft>
-                <a:spcPts val="0"/>
-              </a:spcAft>
-              <a:buNone/>
-            </a:pPr>
-            <a:r>
-              <a:rPr lang="en-US" sz="3300" b="1" i="0" u="none" strike="noStrike" cap="none">
-                <a:solidFill>
-                  <a:srgbClr val="F8FAFC"/>
-                </a:solidFill>
-                <a:latin typeface="Poppins"/>
-                <a:ea typeface="Poppins"/>
-                <a:cs typeface="Poppins"/>
-                <a:sym typeface="Poppins"/>
-              </a:rPr>
-              <a:t>Conclusion &amp; </a:t>
-            </a:r>
-            <a:r>
-              <a:rPr lang="en-US" sz="3300" b="1" i="0" u="none" strike="noStrike" cap="none">
-                <a:solidFill>
-                  <a:srgbClr val="38BDF8"/>
-                </a:solidFill>
-                <a:latin typeface="Poppins"/>
-                <a:ea typeface="Poppins"/>
-                <a:cs typeface="Poppins"/>
-                <a:sym typeface="Poppins"/>
-              </a:rPr>
-              <a:t>Future Scope</a:t>
-            </a:r>
-            <a:endParaRPr/>
-          </a:p>
-        </p:txBody>
-      </p:sp>
-      <p:sp>
-        <p:nvSpPr>
-          <p:cNvPr id="256" name="Google Shape;256;p22"/>
-          <p:cNvSpPr/>
-          <p:nvPr/>
-        </p:nvSpPr>
-        <p:spPr>
-          <a:xfrm>
-            <a:off x="539625" y="840258"/>
-            <a:ext cx="11049000" cy="19200"/>
-          </a:xfrm>
-          <a:prstGeom prst="rect">
-            <a:avLst/>
-          </a:prstGeom>
-          <a:solidFill>
-            <a:srgbClr val="1E293B"/>
-          </a:solidFill>
-          <a:ln>
-            <a:noFill/>
-          </a:ln>
-        </p:spPr>
-        <p:txBody>
-          <a:bodyPr spcFirstLastPara="1" wrap="square" lIns="91425" tIns="45700" rIns="91425" bIns="45700" anchor="ctr" anchorCtr="0">
-            <a:noAutofit/>
-          </a:bodyPr>
-          <a:lstStyle/>
-          <a:p>
-            <a:pPr marL="0" marR="0" lvl="0" indent="0" algn="ctr" rtl="0">
-              <a:spcBef>
-                <a:spcPts val="0"/>
-              </a:spcBef>
-              <a:spcAft>
-                <a:spcPts val="0"/>
-              </a:spcAft>
-              <a:buNone/>
-            </a:pPr>
-            <a:endParaRPr sz="1800" b="0" i="0" u="none" strike="noStrike" cap="none">
-              <a:solidFill>
-                <a:schemeClr val="dk1"/>
-              </a:solidFill>
-              <a:latin typeface="Calibri"/>
-              <a:ea typeface="Calibri"/>
-              <a:cs typeface="Calibri"/>
-              <a:sym typeface="Calibri"/>
-            </a:endParaRPr>
-          </a:p>
-        </p:txBody>
-      </p:sp>
-      <p:sp>
-        <p:nvSpPr>
-          <p:cNvPr id="257" name="Google Shape;257;p22"/>
-          <p:cNvSpPr txBox="1"/>
-          <p:nvPr/>
-        </p:nvSpPr>
-        <p:spPr>
-          <a:xfrm>
-            <a:off x="904875" y="993033"/>
-            <a:ext cx="4953000" cy="1052400"/>
-          </a:xfrm>
-          <a:prstGeom prst="rect">
-            <a:avLst/>
-          </a:prstGeom>
-          <a:noFill/>
-          <a:ln>
-            <a:noFill/>
-          </a:ln>
-        </p:spPr>
-        <p:txBody>
-          <a:bodyPr spcFirstLastPara="1" wrap="square" lIns="0" tIns="0" rIns="0" bIns="0" anchor="t" anchorCtr="0">
-            <a:spAutoFit/>
-          </a:bodyPr>
-          <a:lstStyle/>
-          <a:p>
-            <a:pPr marL="0" marR="0" lvl="0" indent="0" algn="l" rtl="0">
-              <a:lnSpc>
-                <a:spcPct val="126611"/>
-              </a:lnSpc>
-              <a:spcBef>
-                <a:spcPts val="0"/>
-              </a:spcBef>
-              <a:spcAft>
-                <a:spcPts val="0"/>
-              </a:spcAft>
-              <a:buNone/>
-            </a:pPr>
-            <a:r>
-              <a:rPr lang="en-US" sz="1425" b="1" i="0" u="none" strike="noStrike" cap="none">
-                <a:solidFill>
-                  <a:srgbClr val="F8FAFC"/>
-                </a:solidFill>
-                <a:latin typeface="Inter"/>
-                <a:ea typeface="Inter"/>
-                <a:cs typeface="Inter"/>
-                <a:sym typeface="Inter"/>
-              </a:rPr>
-              <a:t>Current State</a:t>
-            </a:r>
-            <a:br>
-              <a:rPr lang="en-US" sz="1800" b="0" i="0" u="none" strike="noStrike" cap="none">
-                <a:solidFill>
-                  <a:schemeClr val="dk1"/>
-                </a:solidFill>
-                <a:latin typeface="Calibri"/>
-                <a:ea typeface="Calibri"/>
-                <a:cs typeface="Calibri"/>
-                <a:sym typeface="Calibri"/>
-              </a:rPr>
-            </a:br>
-            <a:r>
-              <a:rPr lang="en-US" sz="1425" b="0" i="0" u="none" strike="noStrike" cap="none">
+              <a:rPr lang="en-US" b="0" i="0" u="none" strike="noStrike" cap="none" dirty="0">
                 <a:solidFill>
                   <a:srgbClr val="CBD5E1"/>
                 </a:solidFill>
@@ -12098,348 +11365,11 @@
                 <a:cs typeface="Inter"/>
                 <a:sym typeface="Inter"/>
               </a:rPr>
-              <a:t> We have a fully functional, highly reactive MVVM weather application that successfully bridges local caching with remote data syncing.</a:t>
+              <a:t>Presented by: Liran Cordova, Or Rodrigez, Or Zuka</a:t>
             </a:r>
-            <a:endParaRPr/>
           </a:p>
         </p:txBody>
       </p:sp>
-      <p:sp>
-        <p:nvSpPr>
-          <p:cNvPr id="258" name="Google Shape;258;p22"/>
-          <p:cNvSpPr txBox="1"/>
-          <p:nvPr/>
-        </p:nvSpPr>
-        <p:spPr>
-          <a:xfrm>
-            <a:off x="904875" y="2615951"/>
-            <a:ext cx="4953000" cy="1251198"/>
-          </a:xfrm>
-          <a:prstGeom prst="rect">
-            <a:avLst/>
-          </a:prstGeom>
-          <a:noFill/>
-          <a:ln>
-            <a:noFill/>
-          </a:ln>
-        </p:spPr>
-        <p:txBody>
-          <a:bodyPr spcFirstLastPara="1" wrap="square" lIns="0" tIns="0" rIns="0" bIns="0" anchor="t" anchorCtr="0">
-            <a:spAutoFit/>
-          </a:bodyPr>
-          <a:lstStyle/>
-          <a:p>
-            <a:pPr marL="0" marR="0" lvl="0" indent="0" algn="l" rtl="0">
-              <a:lnSpc>
-                <a:spcPct val="126611"/>
-              </a:lnSpc>
-              <a:spcBef>
-                <a:spcPts val="0"/>
-              </a:spcBef>
-              <a:spcAft>
-                <a:spcPts val="0"/>
-              </a:spcAft>
-              <a:buNone/>
-            </a:pPr>
-            <a:r>
-              <a:rPr lang="en-US" sz="1425" b="1" i="0" u="none" strike="noStrike" cap="none">
-                <a:solidFill>
-                  <a:srgbClr val="F8FAFC"/>
-                </a:solidFill>
-                <a:latin typeface="Inter"/>
-                <a:ea typeface="Inter"/>
-                <a:cs typeface="Inter"/>
-                <a:sym typeface="Inter"/>
-              </a:rPr>
-              <a:t>Widgets</a:t>
-            </a:r>
-            <a:br>
-              <a:rPr lang="en-US" sz="1800" b="0" i="0" u="none" strike="noStrike" cap="none">
-                <a:solidFill>
-                  <a:schemeClr val="dk1"/>
-                </a:solidFill>
-                <a:latin typeface="Calibri"/>
-                <a:ea typeface="Calibri"/>
-                <a:cs typeface="Calibri"/>
-                <a:sym typeface="Calibri"/>
-              </a:rPr>
-            </a:br>
-            <a:r>
-              <a:rPr lang="en-US" sz="1425" b="0" i="0" u="none" strike="noStrike" cap="none">
-                <a:solidFill>
-                  <a:srgbClr val="CBD5E1"/>
-                </a:solidFill>
-                <a:latin typeface="Inter"/>
-                <a:ea typeface="Inter"/>
-                <a:cs typeface="Inter"/>
-                <a:sym typeface="Inter"/>
-              </a:rPr>
-              <a:t> Planned development of interactive home screen widgets for immediate glanceability without opening the app.</a:t>
-            </a:r>
-            <a:endParaRPr/>
-          </a:p>
-        </p:txBody>
-      </p:sp>
-      <p:sp>
-        <p:nvSpPr>
-          <p:cNvPr id="259" name="Google Shape;259;p22"/>
-          <p:cNvSpPr txBox="1"/>
-          <p:nvPr/>
-        </p:nvSpPr>
-        <p:spPr>
-          <a:xfrm>
-            <a:off x="904875" y="4105275"/>
-            <a:ext cx="4953000" cy="1251198"/>
-          </a:xfrm>
-          <a:prstGeom prst="rect">
-            <a:avLst/>
-          </a:prstGeom>
-          <a:noFill/>
-          <a:ln>
-            <a:noFill/>
-          </a:ln>
-        </p:spPr>
-        <p:txBody>
-          <a:bodyPr spcFirstLastPara="1" wrap="square" lIns="0" tIns="0" rIns="0" bIns="0" anchor="t" anchorCtr="0">
-            <a:spAutoFit/>
-          </a:bodyPr>
-          <a:lstStyle/>
-          <a:p>
-            <a:pPr marL="0" marR="0" lvl="0" indent="0" algn="l" rtl="0">
-              <a:lnSpc>
-                <a:spcPct val="126611"/>
-              </a:lnSpc>
-              <a:spcBef>
-                <a:spcPts val="0"/>
-              </a:spcBef>
-              <a:spcAft>
-                <a:spcPts val="0"/>
-              </a:spcAft>
-              <a:buNone/>
-            </a:pPr>
-            <a:r>
-              <a:rPr lang="en-US" sz="1425" b="1" i="0" u="none" strike="noStrike" cap="none">
-                <a:solidFill>
-                  <a:srgbClr val="F8FAFC"/>
-                </a:solidFill>
-                <a:latin typeface="Inter"/>
-                <a:ea typeface="Inter"/>
-                <a:cs typeface="Inter"/>
-                <a:sym typeface="Inter"/>
-              </a:rPr>
-              <a:t>Radar Integration</a:t>
-            </a:r>
-            <a:br>
-              <a:rPr lang="en-US" sz="1800" b="0" i="0" u="none" strike="noStrike" cap="none">
-                <a:solidFill>
-                  <a:schemeClr val="dk1"/>
-                </a:solidFill>
-                <a:latin typeface="Calibri"/>
-                <a:ea typeface="Calibri"/>
-                <a:cs typeface="Calibri"/>
-                <a:sym typeface="Calibri"/>
-              </a:rPr>
-            </a:br>
-            <a:r>
-              <a:rPr lang="en-US" sz="1425" b="0" i="0" u="none" strike="noStrike" cap="none">
-                <a:solidFill>
-                  <a:srgbClr val="CBD5E1"/>
-                </a:solidFill>
-                <a:latin typeface="Inter"/>
-                <a:ea typeface="Inter"/>
-                <a:cs typeface="Inter"/>
-                <a:sym typeface="Inter"/>
-              </a:rPr>
-              <a:t> Incorporating real-time, animated radar maps to visually track incoming storms and precipitation.</a:t>
-            </a:r>
-            <a:endParaRPr/>
-          </a:p>
-        </p:txBody>
-      </p:sp>
-      <p:sp>
-        <p:nvSpPr>
-          <p:cNvPr id="260" name="Google Shape;260;p22"/>
-          <p:cNvSpPr txBox="1"/>
-          <p:nvPr/>
-        </p:nvSpPr>
-        <p:spPr>
-          <a:xfrm>
-            <a:off x="904875" y="5594598"/>
-            <a:ext cx="4953000" cy="1263401"/>
-          </a:xfrm>
-          <a:prstGeom prst="rect">
-            <a:avLst/>
-          </a:prstGeom>
-          <a:noFill/>
-          <a:ln>
-            <a:noFill/>
-          </a:ln>
-        </p:spPr>
-        <p:txBody>
-          <a:bodyPr spcFirstLastPara="1" wrap="square" lIns="0" tIns="0" rIns="0" bIns="0" anchor="t" anchorCtr="0">
-            <a:spAutoFit/>
-          </a:bodyPr>
-          <a:lstStyle/>
-          <a:p>
-            <a:pPr marL="0" marR="0" lvl="0" indent="0" algn="l" rtl="0">
-              <a:lnSpc>
-                <a:spcPct val="126611"/>
-              </a:lnSpc>
-              <a:spcBef>
-                <a:spcPts val="0"/>
-              </a:spcBef>
-              <a:spcAft>
-                <a:spcPts val="0"/>
-              </a:spcAft>
-              <a:buNone/>
-            </a:pPr>
-            <a:r>
-              <a:rPr lang="en-US" sz="1425" b="1" i="0" u="none" strike="noStrike" cap="none">
-                <a:solidFill>
-                  <a:srgbClr val="F8FAFC"/>
-                </a:solidFill>
-                <a:latin typeface="Inter"/>
-                <a:ea typeface="Inter"/>
-                <a:cs typeface="Inter"/>
-                <a:sym typeface="Inter"/>
-              </a:rPr>
-              <a:t>Provider Expansion</a:t>
-            </a:r>
-            <a:br>
-              <a:rPr lang="en-US" sz="1800" b="0" i="0" u="none" strike="noStrike" cap="none">
-                <a:solidFill>
-                  <a:schemeClr val="dk1"/>
-                </a:solidFill>
-                <a:latin typeface="Calibri"/>
-                <a:ea typeface="Calibri"/>
-                <a:cs typeface="Calibri"/>
-                <a:sym typeface="Calibri"/>
-              </a:rPr>
-            </a:br>
-            <a:r>
-              <a:rPr lang="en-US" sz="1425" b="0" i="0" u="none" strike="noStrike" cap="none">
-                <a:solidFill>
-                  <a:srgbClr val="CBD5E1"/>
-                </a:solidFill>
-                <a:latin typeface="Inter"/>
-                <a:ea typeface="Inter"/>
-                <a:cs typeface="Inter"/>
-                <a:sym typeface="Inter"/>
-              </a:rPr>
-              <a:t> Abstracting the repository further to support multiple weather providers (e.g., AccuWeather, WeatherAPI) as fallbacks.</a:t>
-            </a:r>
-            <a:endParaRPr/>
-          </a:p>
-        </p:txBody>
-      </p:sp>
-      <p:pic>
-        <p:nvPicPr>
-          <p:cNvPr id="261" name="Google Shape;261;p22" descr="image.png"/>
-          <p:cNvPicPr preferRelativeResize="0"/>
-          <p:nvPr/>
-        </p:nvPicPr>
-        <p:blipFill rotWithShape="1">
-          <a:blip r:embed="rId4">
-            <a:alphaModFix/>
-          </a:blip>
-          <a:srcRect/>
-          <a:stretch/>
-        </p:blipFill>
-        <p:spPr>
-          <a:xfrm>
-            <a:off x="557213" y="993020"/>
-            <a:ext cx="171450" cy="200025"/>
-          </a:xfrm>
-          <a:prstGeom prst="rect">
-            <a:avLst/>
-          </a:prstGeom>
-          <a:noFill/>
-          <a:ln>
-            <a:noFill/>
-          </a:ln>
-        </p:spPr>
-      </p:pic>
-      <p:pic>
-        <p:nvPicPr>
-          <p:cNvPr id="262" name="Google Shape;262;p22" descr="image.png"/>
-          <p:cNvPicPr preferRelativeResize="0"/>
-          <p:nvPr/>
-        </p:nvPicPr>
-        <p:blipFill rotWithShape="1">
-          <a:blip r:embed="rId5">
-            <a:alphaModFix/>
-          </a:blip>
-          <a:srcRect/>
-          <a:stretch/>
-        </p:blipFill>
-        <p:spPr>
-          <a:xfrm>
-            <a:off x="571500" y="2649289"/>
-            <a:ext cx="142875" cy="200025"/>
-          </a:xfrm>
-          <a:prstGeom prst="rect">
-            <a:avLst/>
-          </a:prstGeom>
-          <a:noFill/>
-          <a:ln>
-            <a:noFill/>
-          </a:ln>
-        </p:spPr>
-      </p:pic>
-      <p:pic>
-        <p:nvPicPr>
-          <p:cNvPr id="263" name="Google Shape;263;p22" descr="image.png"/>
-          <p:cNvPicPr preferRelativeResize="0"/>
-          <p:nvPr/>
-        </p:nvPicPr>
-        <p:blipFill rotWithShape="1">
-          <a:blip r:embed="rId6">
-            <a:alphaModFix/>
-          </a:blip>
-          <a:srcRect/>
-          <a:stretch/>
-        </p:blipFill>
-        <p:spPr>
-          <a:xfrm>
-            <a:off x="571500" y="4138612"/>
-            <a:ext cx="190500" cy="200025"/>
-          </a:xfrm>
-          <a:prstGeom prst="rect">
-            <a:avLst/>
-          </a:prstGeom>
-          <a:noFill/>
-          <a:ln>
-            <a:noFill/>
-          </a:ln>
-        </p:spPr>
-      </p:pic>
-      <p:pic>
-        <p:nvPicPr>
-          <p:cNvPr id="264" name="Google Shape;264;p22" descr="image.png"/>
-          <p:cNvPicPr preferRelativeResize="0"/>
-          <p:nvPr/>
-        </p:nvPicPr>
-        <p:blipFill rotWithShape="1">
-          <a:blip r:embed="rId7">
-            <a:alphaModFix/>
-          </a:blip>
-          <a:srcRect/>
-          <a:stretch/>
-        </p:blipFill>
-        <p:spPr>
-          <a:xfrm>
-            <a:off x="571500" y="5627935"/>
-            <a:ext cx="190500" cy="200025"/>
-          </a:xfrm>
-          <a:prstGeom prst="rect">
-            <a:avLst/>
-          </a:prstGeom>
-          <a:noFill/>
-          <a:ln>
-            <a:noFill/>
-          </a:ln>
-        </p:spPr>
-      </p:pic>
     </p:spTree>
   </p:cSld>
   <p:clrMapOvr>
@@ -12723,7 +11653,7 @@
         <p:spPr>
           <a:xfrm>
             <a:off x="904875" y="3866554"/>
-            <a:ext cx="2825799" cy="1553765"/>
+            <a:ext cx="2825799" cy="1569660"/>
           </a:xfrm>
           <a:prstGeom prst="rect">
             <a:avLst/>
@@ -12752,7 +11682,7 @@
               <a:buNone/>
             </a:pPr>
             <a:r>
-              <a:rPr lang="en-US" sz="1275" b="0" i="0" u="none" strike="noStrike" cap="none">
+              <a:rPr lang="en-US" sz="1275" b="0" i="0" u="none" strike="noStrike" cap="none" dirty="0">
                 <a:solidFill>
                   <a:srgbClr val="CBD5E1"/>
                 </a:solidFill>
@@ -12761,9 +11691,33 @@
                 <a:cs typeface="Inter"/>
                 <a:sym typeface="Inter"/>
               </a:rPr>
-              <a:t>An Android application providing real-time weather data, detailed 5-day forecasts, and critical air quality (pollution) information seamlessly powered by the OpenWeatherMap API.</a:t>
+              <a:t>An Android application providing real-time weather data, detailed 5-day forecasts, and air quality (pollution) information powered by the </a:t>
             </a:r>
-            <a:endParaRPr/>
+            <a:r>
+              <a:rPr lang="en-US" sz="1275" b="0" i="0" u="none" strike="noStrike" cap="none" dirty="0" err="1">
+                <a:solidFill>
+                  <a:srgbClr val="CBD5E1"/>
+                </a:solidFill>
+                <a:latin typeface="Inter"/>
+                <a:ea typeface="Inter"/>
+                <a:cs typeface="Inter"/>
+                <a:sym typeface="Inter"/>
+              </a:rPr>
+              <a:t>OpenWeatherMap</a:t>
+            </a:r>
+            <a:r>
+              <a:rPr lang="en-US" sz="1275" b="0" i="0" u="none" strike="noStrike" cap="none" dirty="0">
+                <a:solidFill>
+                  <a:srgbClr val="CBD5E1"/>
+                </a:solidFill>
+                <a:latin typeface="Inter"/>
+                <a:ea typeface="Inter"/>
+                <a:cs typeface="Inter"/>
+                <a:sym typeface="Inter"/>
+              </a:rPr>
+              <a:t> API.</a:t>
+            </a:r>
+            <a:endParaRPr dirty="0"/>
           </a:p>
         </p:txBody>
       </p:sp>
@@ -12826,7 +11780,7 @@
         <p:spPr>
           <a:xfrm>
             <a:off x="4683174" y="3866554"/>
-            <a:ext cx="2825799" cy="1294804"/>
+            <a:ext cx="2825799" cy="1255728"/>
           </a:xfrm>
           <a:prstGeom prst="rect">
             <a:avLst/>
@@ -12855,7 +11809,7 @@
               <a:buNone/>
             </a:pPr>
             <a:r>
-              <a:rPr lang="en-US" sz="1275" b="0" i="0" u="none" strike="noStrike" cap="none">
+              <a:rPr lang="en-US" sz="1275" b="0" i="0" u="none" strike="noStrike" cap="none" dirty="0">
                 <a:solidFill>
                   <a:srgbClr val="CBD5E1"/>
                 </a:solidFill>
@@ -12864,9 +11818,9 @@
                 <a:cs typeface="Inter"/>
                 <a:sym typeface="Inter"/>
               </a:rPr>
-              <a:t>To offer users a clean, distraction-free, and ad-free interface to monitor their local environment and seamlessly manage favorite global locations for quick access.</a:t>
+              <a:t>Offer users a clean interface to monitor their local environment and manage favorite global locations for quick access.</a:t>
             </a:r>
-            <a:endParaRPr/>
+            <a:endParaRPr dirty="0"/>
           </a:p>
         </p:txBody>
       </p:sp>
@@ -12929,7 +11883,7 @@
         <p:spPr>
           <a:xfrm>
             <a:off x="8461474" y="3866554"/>
-            <a:ext cx="2825799" cy="1294804"/>
+            <a:ext cx="2825799" cy="1569660"/>
           </a:xfrm>
           <a:prstGeom prst="rect">
             <a:avLst/>
@@ -12958,7 +11912,7 @@
               <a:buNone/>
             </a:pPr>
             <a:r>
-              <a:rPr lang="en-US" sz="1275" b="0" i="0" u="none" strike="noStrike" cap="none">
+              <a:rPr lang="en-US" sz="1275" b="0" i="0" u="none" strike="noStrike" cap="none" dirty="0">
                 <a:solidFill>
                   <a:srgbClr val="CBD5E1"/>
                 </a:solidFill>
@@ -12967,9 +11921,9 @@
                 <a:cs typeface="Inter"/>
                 <a:sym typeface="Inter"/>
               </a:rPr>
-              <a:t>Designed for general mobile users, frequent travelers, and health-conscious individuals who need reliable, at-a-glance monitoring of varying air quality levels.</a:t>
+              <a:t>Designed for general mobile users, frequent travelers, and health-conscious individuals who need reliable monitoring of varying air quality levels.</a:t>
             </a:r>
-            <a:endParaRPr/>
+            <a:endParaRPr dirty="0"/>
           </a:p>
         </p:txBody>
       </p:sp>
@@ -13366,7 +12320,7 @@
               <a:buNone/>
             </a:pPr>
             <a:r>
-              <a:rPr lang="en-US" sz="1125" b="0" i="0" u="none" strike="noStrike" cap="none">
+              <a:rPr lang="en-US" sz="1125" b="0" i="0" u="none" strike="noStrike" cap="none" dirty="0">
                 <a:solidFill>
                   <a:srgbClr val="CBD5E1"/>
                 </a:solidFill>
@@ -13377,7 +12331,7 @@
               </a:rPr>
               <a:t>Displays current temperature, core weather conditions, and main quick actions.</a:t>
             </a:r>
-            <a:endParaRPr/>
+            <a:endParaRPr dirty="0"/>
           </a:p>
         </p:txBody>
       </p:sp>
@@ -13440,7 +12394,7 @@
         <p:spPr>
           <a:xfrm>
             <a:off x="4540299" y="5657850"/>
-            <a:ext cx="3111549" cy="400050"/>
+            <a:ext cx="3111549" cy="484748"/>
           </a:xfrm>
           <a:prstGeom prst="rect">
             <a:avLst/>
@@ -13469,7 +12423,7 @@
               <a:buNone/>
             </a:pPr>
             <a:r>
-              <a:rPr lang="en-US" sz="1125" b="0" i="0" u="none" strike="noStrike" cap="none">
+              <a:rPr lang="en-US" sz="1125" b="0" i="0" u="none" strike="noStrike" cap="none" dirty="0">
                 <a:solidFill>
                   <a:srgbClr val="CBD5E1"/>
                 </a:solidFill>
@@ -13478,9 +12432,9 @@
                 <a:cs typeface="Inter"/>
                 <a:sym typeface="Inter"/>
               </a:rPr>
-              <a:t>Shows a detailed, scrollable list of the next 5 days' predicted weather.</a:t>
+              <a:t>Shows a detailed, scrollable list of the next 5 days predicted weather.</a:t>
             </a:r>
-            <a:endParaRPr/>
+            <a:endParaRPr dirty="0"/>
           </a:p>
         </p:txBody>
       </p:sp>
@@ -13572,7 +12526,7 @@
               <a:buNone/>
             </a:pPr>
             <a:r>
-              <a:rPr lang="en-US" sz="1125" b="0" i="0" u="none" strike="noStrike" cap="none">
+              <a:rPr lang="en-US" sz="1125" b="0" i="0" u="none" strike="noStrike" cap="none" dirty="0">
                 <a:solidFill>
                   <a:srgbClr val="CBD5E1"/>
                 </a:solidFill>
@@ -13583,7 +12537,7 @@
               </a:rPr>
               <a:t>Detailed breakdown of the AQI (Air Quality Index) and specific pollutant metrics.</a:t>
             </a:r>
-            <a:endParaRPr/>
+            <a:endParaRPr dirty="0"/>
           </a:p>
         </p:txBody>
       </p:sp>
@@ -13684,8 +12638,8 @@
         </p:blipFill>
         <p:spPr>
           <a:xfrm>
-            <a:off x="981075" y="1352550"/>
-            <a:ext cx="2731775" cy="3752852"/>
+            <a:off x="1234520" y="1971062"/>
+            <a:ext cx="2174493" cy="3175009"/>
           </a:xfrm>
           <a:prstGeom prst="rect">
             <a:avLst/>
@@ -13712,8 +12666,8 @@
         </p:blipFill>
         <p:spPr>
           <a:xfrm>
-            <a:off x="4711750" y="1352550"/>
-            <a:ext cx="2731775" cy="3752852"/>
+            <a:off x="5086616" y="2008675"/>
+            <a:ext cx="2174492" cy="3137395"/>
           </a:xfrm>
           <a:prstGeom prst="rect">
             <a:avLst/>
@@ -13740,8 +12694,8 @@
         </p:blipFill>
         <p:spPr>
           <a:xfrm>
-            <a:off x="8479300" y="1352550"/>
-            <a:ext cx="2731775" cy="3752852"/>
+            <a:off x="8864916" y="1965078"/>
+            <a:ext cx="2174492" cy="3137395"/>
           </a:xfrm>
           <a:prstGeom prst="rect">
             <a:avLst/>
@@ -14035,7 +12989,7 @@
         <p:spPr>
           <a:xfrm>
             <a:off x="762000" y="5657850"/>
-            <a:ext cx="3111600" cy="415500"/>
+            <a:ext cx="3111600" cy="242374"/>
           </a:xfrm>
           <a:prstGeom prst="rect">
             <a:avLst/>
@@ -14064,7 +13018,7 @@
               <a:buNone/>
             </a:pPr>
             <a:r>
-              <a:rPr lang="en-US" sz="1125">
+              <a:rPr lang="en-US" sz="1125" dirty="0">
                 <a:solidFill>
                   <a:srgbClr val="CBD5E1"/>
                 </a:solidFill>
@@ -14073,9 +13027,9 @@
                 <a:cs typeface="Inter"/>
                 <a:sym typeface="Inter"/>
               </a:rPr>
-              <a:t>A dynamic weather forecast list seamlessly managed using ViewModel and Hilt. </a:t>
+              <a:t>A dynamic weather forecast list</a:t>
             </a:r>
-            <a:endParaRPr>
+            <a:endParaRPr dirty="0">
               <a:solidFill>
                 <a:schemeClr val="lt1"/>
               </a:solidFill>
@@ -14142,7 +13096,7 @@
         <p:spPr>
           <a:xfrm>
             <a:off x="4540299" y="5657850"/>
-            <a:ext cx="3111549" cy="400050"/>
+            <a:ext cx="3111549" cy="484748"/>
           </a:xfrm>
           <a:prstGeom prst="rect">
             <a:avLst/>
@@ -14171,7 +13125,7 @@
               <a:buNone/>
             </a:pPr>
             <a:r>
-              <a:rPr lang="en-US" sz="1125" b="0" i="0" u="none" strike="noStrike" cap="none">
+              <a:rPr lang="en-US" sz="1125" b="0" i="0" u="none" strike="noStrike" cap="none" dirty="0">
                 <a:solidFill>
                   <a:srgbClr val="CBD5E1"/>
                 </a:solidFill>
@@ -14180,9 +13134,9 @@
                 <a:cs typeface="Inter"/>
                 <a:sym typeface="Inter"/>
               </a:rPr>
-              <a:t>A list of saved cities securely stored in the local Room database for quick access.</a:t>
+              <a:t>A list of saved cities stored in the local Room database for quick access.</a:t>
             </a:r>
-            <a:endParaRPr/>
+            <a:endParaRPr dirty="0"/>
           </a:p>
         </p:txBody>
       </p:sp>
@@ -14274,7 +13228,7 @@
               <a:buNone/>
             </a:pPr>
             <a:r>
-              <a:rPr lang="en-US" sz="1125" b="0" i="0" u="none" strike="noStrike" cap="none">
+              <a:rPr lang="en-US" sz="1125" b="0" i="0" u="none" strike="noStrike" cap="none" dirty="0">
                 <a:solidFill>
                   <a:srgbClr val="CBD5E1"/>
                 </a:solidFill>
@@ -14285,7 +13239,7 @@
               </a:rPr>
               <a:t>Options for unit toggling (Celsius/Fahrenheit) and notification preferences.</a:t>
             </a:r>
-            <a:endParaRPr/>
+            <a:endParaRPr dirty="0"/>
           </a:p>
         </p:txBody>
       </p:sp>
@@ -14386,8 +13340,8 @@
         </p:blipFill>
         <p:spPr>
           <a:xfrm>
-            <a:off x="952500" y="1352550"/>
-            <a:ext cx="2757050" cy="3752852"/>
+            <a:off x="1250394" y="1837941"/>
+            <a:ext cx="2134466" cy="3182134"/>
           </a:xfrm>
           <a:prstGeom prst="rect">
             <a:avLst/>
@@ -14414,8 +13368,8 @@
         </p:blipFill>
         <p:spPr>
           <a:xfrm>
-            <a:off x="4759375" y="1333500"/>
-            <a:ext cx="2757050" cy="3771899"/>
+            <a:off x="5008753" y="1841495"/>
+            <a:ext cx="2174493" cy="3175009"/>
           </a:xfrm>
           <a:prstGeom prst="rect">
             <a:avLst/>
@@ -14442,8 +13396,8 @@
         </p:blipFill>
         <p:spPr>
           <a:xfrm>
-            <a:off x="8509100" y="1333500"/>
-            <a:ext cx="2757050" cy="3771899"/>
+            <a:off x="8807140" y="1837941"/>
+            <a:ext cx="2134466" cy="3176971"/>
           </a:xfrm>
           <a:prstGeom prst="rect">
             <a:avLst/>
@@ -14662,7 +13616,7 @@
               <a:buNone/>
             </a:pPr>
             <a:r>
-              <a:rPr lang="en-US" sz="1425" b="1" i="0" u="none" strike="noStrike" cap="none">
+              <a:rPr lang="en-US" sz="1425" b="1" i="0" u="none" strike="noStrike" cap="none" dirty="0">
                 <a:solidFill>
                   <a:srgbClr val="F8FAFC"/>
                 </a:solidFill>
@@ -14674,7 +13628,7 @@
               <a:t>MVVM Pattern</a:t>
             </a:r>
             <a:r>
-              <a:rPr lang="en-US" sz="1425" b="0" i="0" u="none" strike="noStrike" cap="none">
+              <a:rPr lang="en-US" sz="1425" b="0" i="0" u="none" strike="noStrike" cap="none" dirty="0">
                 <a:solidFill>
                   <a:srgbClr val="CBD5E1"/>
                 </a:solidFill>
@@ -14683,9 +13637,33 @@
                 <a:cs typeface="Inter"/>
                 <a:sym typeface="Inter"/>
               </a:rPr>
-              <a:t> Utilizes Model-View-ViewModel to separate UI components from business logic and data state.</a:t>
+              <a:t> Utilizes Model-View-</a:t>
             </a:r>
-            <a:endParaRPr/>
+            <a:r>
+              <a:rPr lang="en-US" sz="1425" b="0" i="0" u="none" strike="noStrike" cap="none" dirty="0" err="1">
+                <a:solidFill>
+                  <a:srgbClr val="CBD5E1"/>
+                </a:solidFill>
+                <a:latin typeface="Inter"/>
+                <a:ea typeface="Inter"/>
+                <a:cs typeface="Inter"/>
+                <a:sym typeface="Inter"/>
+              </a:rPr>
+              <a:t>ViewModel</a:t>
+            </a:r>
+            <a:r>
+              <a:rPr lang="en-US" sz="1425" b="0" i="0" u="none" strike="noStrike" cap="none" dirty="0">
+                <a:solidFill>
+                  <a:srgbClr val="CBD5E1"/>
+                </a:solidFill>
+                <a:latin typeface="Inter"/>
+                <a:ea typeface="Inter"/>
+                <a:cs typeface="Inter"/>
+                <a:sym typeface="Inter"/>
+              </a:rPr>
+              <a:t> to separate UI components from business logic and data state.</a:t>
+            </a:r>
+            <a:endParaRPr dirty="0"/>
           </a:p>
         </p:txBody>
       </p:sp>
@@ -14697,7 +13675,7 @@
         </p:nvSpPr>
         <p:spPr>
           <a:xfrm>
-            <a:off x="904875" y="2210246"/>
+            <a:off x="904875" y="2441815"/>
             <a:ext cx="4953000" cy="961727"/>
           </a:xfrm>
           <a:prstGeom prst="rect">
@@ -14727,7 +13705,7 @@
               <a:buNone/>
             </a:pPr>
             <a:r>
-              <a:rPr lang="en-US" sz="1425" b="1" i="0" u="none" strike="noStrike" cap="none">
+              <a:rPr lang="en-US" sz="1425" b="1" i="0" u="none" strike="noStrike" cap="none" dirty="0">
                 <a:solidFill>
                   <a:srgbClr val="F8FAFC"/>
                 </a:solidFill>
@@ -14739,7 +13717,7 @@
               <a:t>Dependency Injection</a:t>
             </a:r>
             <a:r>
-              <a:rPr lang="en-US" sz="1425" b="0" i="0" u="none" strike="noStrike" cap="none">
+              <a:rPr lang="en-US" sz="1425" b="0" i="0" u="none" strike="noStrike" cap="none" dirty="0">
                 <a:solidFill>
                   <a:srgbClr val="CBD5E1"/>
                 </a:solidFill>
@@ -14750,7 +13728,7 @@
               </a:rPr>
               <a:t> Implements Dagger-Hilt for modular, scalable, and easily testable code architecture.</a:t>
             </a:r>
-            <a:endParaRPr/>
+            <a:endParaRPr dirty="0"/>
           </a:p>
         </p:txBody>
       </p:sp>
@@ -14762,7 +13740,7 @@
         </p:nvSpPr>
         <p:spPr>
           <a:xfrm>
-            <a:off x="904875" y="3410098"/>
+            <a:off x="904875" y="3775018"/>
             <a:ext cx="4953000" cy="961727"/>
           </a:xfrm>
           <a:prstGeom prst="rect">
@@ -14792,7 +13770,7 @@
               <a:buNone/>
             </a:pPr>
             <a:r>
-              <a:rPr lang="en-US" sz="1425" b="1" i="0" u="none" strike="noStrike" cap="none">
+              <a:rPr lang="en-US" sz="1425" b="1" i="0" u="none" strike="noStrike" cap="none" dirty="0">
                 <a:solidFill>
                   <a:srgbClr val="F8FAFC"/>
                 </a:solidFill>
@@ -14804,7 +13782,7 @@
               <a:t>Remote Data Flow</a:t>
             </a:r>
             <a:r>
-              <a:rPr lang="en-US" sz="1425" b="0" i="0" u="none" strike="noStrike" cap="none">
+              <a:rPr lang="en-US" sz="1425" b="0" i="0" u="none" strike="noStrike" cap="none" dirty="0">
                 <a:solidFill>
                   <a:srgbClr val="CBD5E1"/>
                 </a:solidFill>
@@ -14813,9 +13791,33 @@
                 <a:cs typeface="Inter"/>
                 <a:sym typeface="Inter"/>
               </a:rPr>
-              <a:t> Retrofit handles fetching structured JSON data from the OpenWeatherMap REST API.</a:t>
+              <a:t> Retrofit handles fetching structured JSON data from the </a:t>
             </a:r>
-            <a:endParaRPr/>
+            <a:r>
+              <a:rPr lang="en-US" sz="1425" b="0" i="0" u="none" strike="noStrike" cap="none" dirty="0" err="1">
+                <a:solidFill>
+                  <a:srgbClr val="CBD5E1"/>
+                </a:solidFill>
+                <a:latin typeface="Inter"/>
+                <a:ea typeface="Inter"/>
+                <a:cs typeface="Inter"/>
+                <a:sym typeface="Inter"/>
+              </a:rPr>
+              <a:t>OpenWeatherMap</a:t>
+            </a:r>
+            <a:r>
+              <a:rPr lang="en-US" sz="1425" b="0" i="0" u="none" strike="noStrike" cap="none" dirty="0">
+                <a:solidFill>
+                  <a:srgbClr val="CBD5E1"/>
+                </a:solidFill>
+                <a:latin typeface="Inter"/>
+                <a:ea typeface="Inter"/>
+                <a:cs typeface="Inter"/>
+                <a:sym typeface="Inter"/>
+              </a:rPr>
+              <a:t> REST API.</a:t>
+            </a:r>
+            <a:endParaRPr dirty="0"/>
           </a:p>
         </p:txBody>
       </p:sp>
@@ -14827,7 +13829,7 @@
         </p:nvSpPr>
         <p:spPr>
           <a:xfrm>
-            <a:off x="904875" y="4609951"/>
+            <a:off x="904875" y="5108221"/>
             <a:ext cx="4953000" cy="961727"/>
           </a:xfrm>
           <a:prstGeom prst="rect">
@@ -14857,7 +13859,7 @@
               <a:buNone/>
             </a:pPr>
             <a:r>
-              <a:rPr lang="en-US" sz="1425" b="1" i="0" u="none" strike="noStrike" cap="none">
+              <a:rPr lang="en-US" sz="1425" b="1" i="0" u="none" strike="noStrike" cap="none" dirty="0">
                 <a:solidFill>
                   <a:srgbClr val="F8FAFC"/>
                 </a:solidFill>
@@ -14869,7 +13871,7 @@
               <a:t>Local Data Flow</a:t>
             </a:r>
             <a:r>
-              <a:rPr lang="en-US" sz="1425" b="0" i="0" u="none" strike="noStrike" cap="none">
+              <a:rPr lang="en-US" sz="1425" b="0" i="0" u="none" strike="noStrike" cap="none" dirty="0">
                 <a:solidFill>
                   <a:srgbClr val="CBD5E1"/>
                 </a:solidFill>
@@ -14880,72 +13882,7 @@
               </a:rPr>
               <a:t> Room Persistence Library securely caches data for offline access and manages Favorites.</a:t>
             </a:r>
-            <a:endParaRPr/>
-          </a:p>
-        </p:txBody>
-      </p:sp>
-      <p:sp>
-        <p:nvSpPr>
-          <p:cNvPr id="160" name="Google Shape;160;p17"/>
-          <p:cNvSpPr txBox="1"/>
-          <p:nvPr/>
-        </p:nvSpPr>
-        <p:spPr>
-          <a:xfrm>
-            <a:off x="904875" y="5809803"/>
-            <a:ext cx="4953000" cy="961727"/>
-          </a:xfrm>
-          <a:prstGeom prst="rect">
-            <a:avLst/>
-          </a:prstGeom>
-          <a:noFill/>
-          <a:ln>
-            <a:noFill/>
-          </a:ln>
-        </p:spPr>
-        <p:txBody>
-          <a:bodyPr spcFirstLastPara="1" wrap="square" lIns="0" tIns="0" rIns="0" bIns="0" anchor="t" anchorCtr="0">
-            <a:spAutoFit/>
-          </a:bodyPr>
-          <a:lstStyle/>
-          <a:p>
-            <a:pPr marL="0" marR="0" lvl="0" indent="0" algn="l" rtl="0">
-              <a:lnSpc>
-                <a:spcPct val="159929"/>
-              </a:lnSpc>
-              <a:spcBef>
-                <a:spcPts val="0"/>
-              </a:spcBef>
-              <a:spcAft>
-                <a:spcPts val="0"/>
-              </a:spcAft>
-              <a:buNone/>
-            </a:pPr>
-            <a:r>
-              <a:rPr lang="en-US" sz="1425" b="1" i="0" u="none" strike="noStrike" cap="none">
-                <a:solidFill>
-                  <a:srgbClr val="F8FAFC"/>
-                </a:solidFill>
-                <a:latin typeface="Inter"/>
-                <a:ea typeface="Inter"/>
-                <a:cs typeface="Inter"/>
-                <a:sym typeface="Inter"/>
-              </a:rPr>
-              <a:t>The Repository</a:t>
-            </a:r>
-            <a:r>
-              <a:rPr lang="en-US" sz="1425" b="0" i="0" u="none" strike="noStrike" cap="none">
-                <a:solidFill>
-                  <a:srgbClr val="CBD5E1"/>
-                </a:solidFill>
-                <a:latin typeface="Inter"/>
-                <a:ea typeface="Inter"/>
-                <a:cs typeface="Inter"/>
-                <a:sym typeface="Inter"/>
-              </a:rPr>
-              <a:t> Acts as the "Single Source of Truth", intelligently routing between network fetch or DB load.</a:t>
-            </a:r>
-            <a:endParaRPr/>
+            <a:endParaRPr dirty="0"/>
           </a:p>
         </p:txBody>
       </p:sp>
@@ -15018,7 +13955,7 @@
         </p:blipFill>
         <p:spPr>
           <a:xfrm>
-            <a:off x="571500" y="2243583"/>
+            <a:off x="571500" y="2475152"/>
             <a:ext cx="190500" cy="200025"/>
           </a:xfrm>
           <a:prstGeom prst="rect">
@@ -15045,7 +13982,7 @@
         </p:blipFill>
         <p:spPr>
           <a:xfrm>
-            <a:off x="571500" y="3443436"/>
+            <a:off x="571500" y="3808356"/>
             <a:ext cx="238125" cy="200025"/>
           </a:xfrm>
           <a:prstGeom prst="rect">
@@ -15072,34 +14009,7 @@
         </p:blipFill>
         <p:spPr>
           <a:xfrm>
-            <a:off x="571500" y="4643288"/>
-            <a:ext cx="171450" cy="200025"/>
-          </a:xfrm>
-          <a:prstGeom prst="rect">
-            <a:avLst/>
-          </a:prstGeom>
-          <a:noFill/>
-          <a:ln>
-            <a:noFill/>
-          </a:ln>
-        </p:spPr>
-      </p:pic>
-      <p:pic>
-        <p:nvPicPr>
-          <p:cNvPr id="166" name="Google Shape;166;p17" descr="image.png"/>
-          <p:cNvPicPr preferRelativeResize="0"/>
-          <p:nvPr/>
-        </p:nvPicPr>
-        <p:blipFill rotWithShape="1">
-          <a:blip r:embed="rId9">
-            <a:alphaModFix/>
-          </a:blip>
-          <a:srcRect/>
-          <a:stretch/>
-        </p:blipFill>
-        <p:spPr>
-          <a:xfrm>
-            <a:off x="571500" y="5843141"/>
+            <a:off x="571500" y="5141558"/>
             <a:ext cx="171450" cy="200025"/>
           </a:xfrm>
           <a:prstGeom prst="rect">
@@ -15118,7 +14028,7 @@
           <p:nvPr/>
         </p:nvPicPr>
         <p:blipFill>
-          <a:blip r:embed="rId10">
+          <a:blip r:embed="rId9">
             <a:alphaModFix/>
           </a:blip>
           <a:stretch>
@@ -15715,7 +14625,7 @@
               <a:buNone/>
             </a:pPr>
             <a:r>
-              <a:rPr lang="en-US" sz="1350" b="1" i="0" u="none" strike="noStrike" cap="none">
+              <a:rPr lang="en-US" sz="1350" b="1" i="0" u="none" strike="noStrike" cap="none" dirty="0">
                 <a:solidFill>
                   <a:srgbClr val="F8FAFC"/>
                 </a:solidFill>
@@ -15727,7 +14637,7 @@
               <a:t>Image Loading (Glide)</a:t>
             </a:r>
             <a:r>
-              <a:rPr lang="en-US" sz="1350" b="0" i="0" u="none" strike="noStrike" cap="none">
+              <a:rPr lang="en-US" sz="1350" b="0" i="0" u="none" strike="noStrike" cap="none" dirty="0">
                 <a:solidFill>
                   <a:srgbClr val="CBD5E1"/>
                 </a:solidFill>
@@ -15738,7 +14648,7 @@
               </a:rPr>
               <a:t> Efficiently fetches and caches high-quality weather icons from the web.</a:t>
             </a:r>
-            <a:endParaRPr/>
+            <a:endParaRPr dirty="0"/>
           </a:p>
         </p:txBody>
       </p:sp>
@@ -15750,7 +14660,7 @@
         </p:nvSpPr>
         <p:spPr>
           <a:xfrm>
-            <a:off x="571500" y="5057775"/>
+            <a:off x="3429000" y="5057775"/>
             <a:ext cx="5334000" cy="1333500"/>
           </a:xfrm>
           <a:prstGeom prst="roundRect">
@@ -15800,7 +14710,7 @@
         </p:nvSpPr>
         <p:spPr>
           <a:xfrm>
-            <a:off x="1285875" y="5295900"/>
+            <a:off x="4143375" y="5295900"/>
             <a:ext cx="4381500" cy="857250"/>
           </a:xfrm>
           <a:prstGeom prst="rect">
@@ -15830,7 +14740,7 @@
               <a:buNone/>
             </a:pPr>
             <a:r>
-              <a:rPr lang="en-US" sz="1350" b="1" i="0" u="none" strike="noStrike" cap="none">
+              <a:rPr lang="en-US" sz="1350" b="1" i="0" u="none" strike="noStrike" cap="none" dirty="0">
                 <a:solidFill>
                   <a:srgbClr val="F8FAFC"/>
                 </a:solidFill>
@@ -15839,10 +14749,34 @@
                 <a:cs typeface="Inter"/>
                 <a:sym typeface="Inter"/>
               </a:rPr>
-              <a:t>Background Tasks (WorkManager)</a:t>
+              <a:t>Background Tasks (</a:t>
             </a:r>
             <a:r>
-              <a:rPr lang="en-US" sz="1350" b="0" i="0" u="none" strike="noStrike" cap="none">
+              <a:rPr lang="en-US" sz="1350" b="1" i="0" u="none" strike="noStrike" cap="none" dirty="0" err="1">
+                <a:solidFill>
+                  <a:srgbClr val="F8FAFC"/>
+                </a:solidFill>
+                <a:latin typeface="Inter"/>
+                <a:ea typeface="Inter"/>
+                <a:cs typeface="Inter"/>
+                <a:sym typeface="Inter"/>
+              </a:rPr>
+              <a:t>WorkManager</a:t>
+            </a:r>
+            <a:r>
+              <a:rPr lang="en-US" sz="1350" b="1" i="0" u="none" strike="noStrike" cap="none" dirty="0">
+                <a:solidFill>
+                  <a:srgbClr val="F8FAFC"/>
+                </a:solidFill>
+                <a:latin typeface="Inter"/>
+                <a:ea typeface="Inter"/>
+                <a:cs typeface="Inter"/>
+                <a:sym typeface="Inter"/>
+              </a:rPr>
+              <a:t>)</a:t>
+            </a:r>
+            <a:r>
+              <a:rPr lang="en-US" sz="1350" b="0" i="0" u="none" strike="noStrike" cap="none" dirty="0">
                 <a:solidFill>
                   <a:srgbClr val="CBD5E1"/>
                 </a:solidFill>
@@ -15853,122 +14787,7 @@
               </a:rPr>
               <a:t> Ensures scheduled weather updates execute reliably even if the app is closed.</a:t>
             </a:r>
-            <a:endParaRPr/>
-          </a:p>
-        </p:txBody>
-      </p:sp>
-      <p:sp>
-        <p:nvSpPr>
-          <p:cNvPr id="184" name="Google Shape;184;p18"/>
-          <p:cNvSpPr/>
-          <p:nvPr/>
-        </p:nvSpPr>
-        <p:spPr>
-          <a:xfrm>
-            <a:off x="6286500" y="5057775"/>
-            <a:ext cx="5334000" cy="1333500"/>
-          </a:xfrm>
-          <a:prstGeom prst="roundRect">
-            <a:avLst>
-              <a:gd name="adj" fmla="val 8571"/>
-            </a:avLst>
-          </a:prstGeom>
-          <a:solidFill>
-            <a:srgbClr val="1E293B"/>
-          </a:solidFill>
-          <a:ln>
-            <a:noFill/>
-          </a:ln>
-        </p:spPr>
-        <p:txBody>
-          <a:bodyPr spcFirstLastPara="1" wrap="square" lIns="91425" tIns="45700" rIns="91425" bIns="45700" anchor="ctr" anchorCtr="0">
-            <a:noAutofit/>
-          </a:bodyPr>
-          <a:lstStyle/>
-          <a:p>
-            <a:pPr marL="0" marR="0" lvl="0" indent="0" algn="ctr" rtl="0">
-              <a:spcBef>
-                <a:spcPts val="0"/>
-              </a:spcBef>
-              <a:spcAft>
-                <a:spcPts val="0"/>
-              </a:spcAft>
-              <a:buNone/>
-            </a:pPr>
-            <a:endParaRPr sz="1800" b="0" i="0" u="none" strike="noStrike" cap="none">
-              <a:solidFill>
-                <a:schemeClr val="dk1"/>
-              </a:solidFill>
-              <a:latin typeface="Calibri"/>
-              <a:ea typeface="Calibri"/>
-              <a:cs typeface="Calibri"/>
-              <a:sym typeface="Calibri"/>
-            </a:endParaRPr>
-          </a:p>
-        </p:txBody>
-      </p:sp>
-      <p:sp>
-        <p:nvSpPr>
-          <p:cNvPr id="185" name="Google Shape;185;p18"/>
-          <p:cNvSpPr txBox="1"/>
-          <p:nvPr/>
-        </p:nvSpPr>
-        <p:spPr>
-          <a:xfrm>
-            <a:off x="7000875" y="5295900"/>
-            <a:ext cx="4381500" cy="857250"/>
-          </a:xfrm>
-          <a:prstGeom prst="rect">
-            <a:avLst/>
-          </a:prstGeom>
-          <a:noFill/>
-          <a:ln>
-            <a:noFill/>
-          </a:ln>
-        </p:spPr>
-        <p:txBody>
-          <a:bodyPr spcFirstLastPara="1" wrap="square" lIns="0" tIns="0" rIns="0" bIns="0" anchor="t" anchorCtr="0">
-            <a:spAutoFit/>
-          </a:bodyPr>
-          <a:lstStyle/>
-          <a:p>
-            <a:pPr marL="0" marR="0" lvl="0" indent="0" algn="l" rtl="0">
-              <a:lnSpc>
-                <a:spcPct val="150000"/>
-              </a:lnSpc>
-              <a:spcBef>
-                <a:spcPts val="0"/>
-              </a:spcBef>
-              <a:spcAft>
-                <a:spcPts val="0"/>
-              </a:spcAft>
-              <a:buNone/>
-            </a:pPr>
-            <a:r>
-              <a:rPr lang="en-US" sz="1350" b="1" i="0" u="none" strike="noStrike" cap="none">
-                <a:solidFill>
-                  <a:srgbClr val="F8FAFC"/>
-                </a:solidFill>
-                <a:latin typeface="Inter"/>
-                <a:ea typeface="Inter"/>
-                <a:cs typeface="Inter"/>
-                <a:sym typeface="Inter"/>
-              </a:rPr>
-              <a:t>Cloud Services (Firebase)</a:t>
-            </a:r>
-            <a:r>
-              <a:rPr lang="en-US" sz="1350" b="0" i="0" u="none" strike="noStrike" cap="none">
-                <a:solidFill>
-                  <a:srgbClr val="CBD5E1"/>
-                </a:solidFill>
-                <a:latin typeface="Inter"/>
-                <a:ea typeface="Inter"/>
-                <a:cs typeface="Inter"/>
-                <a:sym typeface="Inter"/>
-              </a:rPr>
-              <a:t> Powers secure user authentication (Auth) and preference syncing (Firestore).</a:t>
-            </a:r>
-            <a:endParaRPr/>
+            <a:endParaRPr dirty="0"/>
           </a:p>
         </p:txBody>
       </p:sp>
@@ -16095,7 +14914,7 @@
         </p:blipFill>
         <p:spPr>
           <a:xfrm>
-            <a:off x="809625" y="5286375"/>
+            <a:off x="3667125" y="5286375"/>
             <a:ext cx="304800" cy="323850"/>
           </a:xfrm>
           <a:prstGeom prst="rect">
@@ -16107,2224 +14926,6 @@
           </a:ln>
         </p:spPr>
       </p:pic>
-      <p:pic>
-        <p:nvPicPr>
-          <p:cNvPr id="191" name="Google Shape;191;p18" descr="image.png"/>
-          <p:cNvPicPr preferRelativeResize="0"/>
-          <p:nvPr/>
-        </p:nvPicPr>
-        <p:blipFill rotWithShape="1">
-          <a:blip r:embed="rId8">
-            <a:alphaModFix/>
-          </a:blip>
-          <a:srcRect/>
-          <a:stretch/>
-        </p:blipFill>
-        <p:spPr>
-          <a:xfrm>
-            <a:off x="6524625" y="5286375"/>
-            <a:ext cx="266700" cy="323850"/>
-          </a:xfrm>
-          <a:prstGeom prst="rect">
-            <a:avLst/>
-          </a:prstGeom>
-          <a:noFill/>
-          <a:ln>
-            <a:noFill/>
-          </a:ln>
-        </p:spPr>
-      </p:pic>
-    </p:spTree>
-  </p:cSld>
-  <p:clrMapOvr>
-    <a:masterClrMapping/>
-  </p:clrMapOvr>
-</p:sld>
-</file>
-
-<file path=ppt/slides/slide7.xml><?xml version="1.0" encoding="utf-8"?>
-<p:sld xmlns:a="http://schemas.openxmlformats.org/drawingml/2006/main" xmlns:r="http://schemas.openxmlformats.org/officeDocument/2006/relationships" xmlns:p="http://schemas.openxmlformats.org/presentationml/2006/main">
-  <p:cSld>
-    <p:bg>
-      <p:bgPr>
-        <a:solidFill>
-          <a:srgbClr val="0F172A"/>
-        </a:solidFill>
-        <a:effectLst/>
-      </p:bgPr>
-    </p:bg>
-    <p:spTree>
-      <p:nvGrpSpPr>
-        <p:cNvPr id="1" name="Shape 195"/>
-        <p:cNvGrpSpPr/>
-        <p:nvPr/>
-      </p:nvGrpSpPr>
-      <p:grpSpPr>
-        <a:xfrm>
-          <a:off x="0" y="0"/>
-          <a:ext cx="0" cy="0"/>
-          <a:chOff x="0" y="0"/>
-          <a:chExt cx="0" cy="0"/>
-        </a:xfrm>
-      </p:grpSpPr>
-      <p:pic>
-        <p:nvPicPr>
-          <p:cNvPr id="196" name="Google Shape;196;p19" descr="image.png"/>
-          <p:cNvPicPr preferRelativeResize="0"/>
-          <p:nvPr/>
-        </p:nvPicPr>
-        <p:blipFill rotWithShape="1">
-          <a:blip r:embed="rId3">
-            <a:alphaModFix/>
-          </a:blip>
-          <a:srcRect/>
-          <a:stretch/>
-        </p:blipFill>
-        <p:spPr>
-          <a:xfrm>
-            <a:off x="571500" y="2136874"/>
-            <a:ext cx="3492549" cy="3746301"/>
-          </a:xfrm>
-          <a:prstGeom prst="rect">
-            <a:avLst/>
-          </a:prstGeom>
-          <a:noFill/>
-          <a:ln>
-            <a:noFill/>
-          </a:ln>
-        </p:spPr>
-      </p:pic>
-      <p:pic>
-        <p:nvPicPr>
-          <p:cNvPr id="197" name="Google Shape;197;p19" descr="image.png"/>
-          <p:cNvPicPr preferRelativeResize="0"/>
-          <p:nvPr/>
-        </p:nvPicPr>
-        <p:blipFill rotWithShape="1">
-          <a:blip r:embed="rId4">
-            <a:alphaModFix/>
-          </a:blip>
-          <a:srcRect/>
-          <a:stretch/>
-        </p:blipFill>
-        <p:spPr>
-          <a:xfrm>
-            <a:off x="4349799" y="2136874"/>
-            <a:ext cx="3492549" cy="3746301"/>
-          </a:xfrm>
-          <a:prstGeom prst="rect">
-            <a:avLst/>
-          </a:prstGeom>
-          <a:noFill/>
-          <a:ln>
-            <a:noFill/>
-          </a:ln>
-        </p:spPr>
-      </p:pic>
-      <p:pic>
-        <p:nvPicPr>
-          <p:cNvPr id="198" name="Google Shape;198;p19" descr="image.png"/>
-          <p:cNvPicPr preferRelativeResize="0"/>
-          <p:nvPr/>
-        </p:nvPicPr>
-        <p:blipFill rotWithShape="1">
-          <a:blip r:embed="rId5">
-            <a:alphaModFix/>
-          </a:blip>
-          <a:srcRect/>
-          <a:stretch/>
-        </p:blipFill>
-        <p:spPr>
-          <a:xfrm>
-            <a:off x="8128099" y="2136874"/>
-            <a:ext cx="3492549" cy="3746301"/>
-          </a:xfrm>
-          <a:prstGeom prst="rect">
-            <a:avLst/>
-          </a:prstGeom>
-          <a:noFill/>
-          <a:ln>
-            <a:noFill/>
-          </a:ln>
-        </p:spPr>
-      </p:pic>
-      <p:sp>
-        <p:nvSpPr>
-          <p:cNvPr id="199" name="Google Shape;199;p19"/>
-          <p:cNvSpPr txBox="1"/>
-          <p:nvPr/>
-        </p:nvSpPr>
-        <p:spPr>
-          <a:xfrm>
-            <a:off x="571500" y="571500"/>
-            <a:ext cx="11601450" cy="638175"/>
-          </a:xfrm>
-          <a:prstGeom prst="rect">
-            <a:avLst/>
-          </a:prstGeom>
-          <a:noFill/>
-          <a:ln>
-            <a:noFill/>
-          </a:ln>
-        </p:spPr>
-        <p:txBody>
-          <a:bodyPr spcFirstLastPara="1" wrap="square" lIns="0" tIns="0" rIns="0" bIns="0" anchor="t" anchorCtr="0">
-            <a:spAutoFit/>
-          </a:bodyPr>
-          <a:lstStyle/>
-          <a:p>
-            <a:pPr marL="0" marR="0" lvl="0" indent="0" algn="l" rtl="0">
-              <a:spcBef>
-                <a:spcPts val="0"/>
-              </a:spcBef>
-              <a:spcAft>
-                <a:spcPts val="0"/>
-              </a:spcAft>
-              <a:buNone/>
-            </a:pPr>
-            <a:r>
-              <a:rPr lang="en-US" sz="3300" b="1" i="0" u="none" strike="noStrike" cap="none">
-                <a:solidFill>
-                  <a:srgbClr val="F8FAFC"/>
-                </a:solidFill>
-                <a:latin typeface="Poppins"/>
-                <a:ea typeface="Poppins"/>
-                <a:cs typeface="Poppins"/>
-                <a:sym typeface="Poppins"/>
-              </a:rPr>
-              <a:t>Key Code </a:t>
-            </a:r>
-            <a:r>
-              <a:rPr lang="en-US" sz="3300" b="1" i="0" u="none" strike="noStrike" cap="none">
-                <a:solidFill>
-                  <a:srgbClr val="38BDF8"/>
-                </a:solidFill>
-                <a:latin typeface="Poppins"/>
-                <a:ea typeface="Poppins"/>
-                <a:cs typeface="Poppins"/>
-                <a:sym typeface="Poppins"/>
-              </a:rPr>
-              <a:t>Methods</a:t>
-            </a:r>
-            <a:endParaRPr/>
-          </a:p>
-        </p:txBody>
-      </p:sp>
-      <p:sp>
-        <p:nvSpPr>
-          <p:cNvPr id="200" name="Google Shape;200;p19"/>
-          <p:cNvSpPr/>
-          <p:nvPr/>
-        </p:nvSpPr>
-        <p:spPr>
-          <a:xfrm>
-            <a:off x="571500" y="1333500"/>
-            <a:ext cx="11049000" cy="19050"/>
-          </a:xfrm>
-          <a:prstGeom prst="rect">
-            <a:avLst/>
-          </a:prstGeom>
-          <a:solidFill>
-            <a:srgbClr val="1E293B"/>
-          </a:solidFill>
-          <a:ln>
-            <a:noFill/>
-          </a:ln>
-        </p:spPr>
-        <p:txBody>
-          <a:bodyPr spcFirstLastPara="1" wrap="square" lIns="91425" tIns="45700" rIns="91425" bIns="45700" anchor="ctr" anchorCtr="0">
-            <a:noAutofit/>
-          </a:bodyPr>
-          <a:lstStyle/>
-          <a:p>
-            <a:pPr marL="0" marR="0" lvl="0" indent="0" algn="ctr" rtl="0">
-              <a:spcBef>
-                <a:spcPts val="0"/>
-              </a:spcBef>
-              <a:spcAft>
-                <a:spcPts val="0"/>
-              </a:spcAft>
-              <a:buNone/>
-            </a:pPr>
-            <a:endParaRPr sz="1800" b="0" i="0" u="none" strike="noStrike" cap="none">
-              <a:solidFill>
-                <a:schemeClr val="dk1"/>
-              </a:solidFill>
-              <a:latin typeface="Calibri"/>
-              <a:ea typeface="Calibri"/>
-              <a:cs typeface="Calibri"/>
-              <a:sym typeface="Calibri"/>
-            </a:endParaRPr>
-          </a:p>
-        </p:txBody>
-      </p:sp>
-      <p:sp>
-        <p:nvSpPr>
-          <p:cNvPr id="201" name="Google Shape;201;p19"/>
-          <p:cNvSpPr txBox="1"/>
-          <p:nvPr/>
-        </p:nvSpPr>
-        <p:spPr>
-          <a:xfrm>
-            <a:off x="904875" y="3260824"/>
-            <a:ext cx="2967089" cy="333375"/>
-          </a:xfrm>
-          <a:prstGeom prst="rect">
-            <a:avLst/>
-          </a:prstGeom>
-          <a:noFill/>
-          <a:ln>
-            <a:noFill/>
-          </a:ln>
-        </p:spPr>
-        <p:txBody>
-          <a:bodyPr spcFirstLastPara="1" wrap="square" lIns="0" tIns="0" rIns="0" bIns="0" anchor="t" anchorCtr="0">
-            <a:spAutoFit/>
-          </a:bodyPr>
-          <a:lstStyle/>
-          <a:p>
-            <a:pPr marL="0" marR="0" lvl="0" indent="0" algn="l" rtl="0">
-              <a:spcBef>
-                <a:spcPts val="0"/>
-              </a:spcBef>
-              <a:spcAft>
-                <a:spcPts val="0"/>
-              </a:spcAft>
-              <a:buNone/>
-            </a:pPr>
-            <a:r>
-              <a:rPr lang="en-US" sz="1800" b="1" i="0" u="none" strike="noStrike" cap="none">
-                <a:solidFill>
-                  <a:srgbClr val="F8FAFC"/>
-                </a:solidFill>
-                <a:latin typeface="Poppins"/>
-                <a:ea typeface="Poppins"/>
-                <a:cs typeface="Poppins"/>
-                <a:sym typeface="Poppins"/>
-              </a:rPr>
-              <a:t>refreshForecast()</a:t>
-            </a:r>
-            <a:endParaRPr/>
-          </a:p>
-        </p:txBody>
-      </p:sp>
-      <p:sp>
-        <p:nvSpPr>
-          <p:cNvPr id="202" name="Google Shape;202;p19"/>
-          <p:cNvSpPr txBox="1"/>
-          <p:nvPr/>
-        </p:nvSpPr>
-        <p:spPr>
-          <a:xfrm>
-            <a:off x="904875" y="3737074"/>
-            <a:ext cx="2825799" cy="1812726"/>
-          </a:xfrm>
-          <a:prstGeom prst="rect">
-            <a:avLst/>
-          </a:prstGeom>
-          <a:noFill/>
-          <a:ln>
-            <a:noFill/>
-          </a:ln>
-        </p:spPr>
-        <p:txBody>
-          <a:bodyPr spcFirstLastPara="1" wrap="square" lIns="0" tIns="0" rIns="0" bIns="0" anchor="t" anchorCtr="0">
-            <a:spAutoFit/>
-          </a:bodyPr>
-          <a:lstStyle/>
-          <a:p>
-            <a:pPr marL="0" marR="0" lvl="0" indent="0" algn="l" rtl="0">
-              <a:lnSpc>
-                <a:spcPct val="159921"/>
-              </a:lnSpc>
-              <a:spcBef>
-                <a:spcPts val="0"/>
-              </a:spcBef>
-              <a:spcAft>
-                <a:spcPts val="0"/>
-              </a:spcAft>
-              <a:buNone/>
-            </a:pPr>
-            <a:r>
-              <a:rPr lang="en-US" sz="1275" b="0" i="0" u="none" strike="noStrike" cap="none">
-                <a:solidFill>
-                  <a:srgbClr val="CBD5E1"/>
-                </a:solidFill>
-                <a:latin typeface="Inter"/>
-                <a:ea typeface="Inter"/>
-                <a:cs typeface="Inter"/>
-                <a:sym typeface="Inter"/>
-              </a:rPr>
-              <a:t>Located in the </a:t>
-            </a:r>
-            <a:r>
-              <a:rPr lang="en-US" sz="1275" b="1" i="0" u="none" strike="noStrike" cap="none">
-                <a:solidFill>
-                  <a:srgbClr val="CBD5E1"/>
-                </a:solidFill>
-                <a:latin typeface="Inter"/>
-                <a:ea typeface="Inter"/>
-                <a:cs typeface="Inter"/>
-                <a:sym typeface="Inter"/>
-              </a:rPr>
-              <a:t>WeatherRepository</a:t>
-            </a:r>
-            <a:r>
-              <a:rPr lang="en-US" sz="1275" b="0" i="0" u="none" strike="noStrike" cap="none">
-                <a:solidFill>
-                  <a:srgbClr val="CBD5E1"/>
-                </a:solidFill>
-                <a:latin typeface="Inter"/>
-                <a:ea typeface="Inter"/>
-                <a:cs typeface="Inter"/>
-                <a:sym typeface="Inter"/>
-              </a:rPr>
-              <a:t>. Implements the "Offline-First" approach. It fetches live data from the API and immediately updates the local Room DB, ensuring UI observes the freshest data without lag.</a:t>
-            </a:r>
-            <a:endParaRPr/>
-          </a:p>
-        </p:txBody>
-      </p:sp>
-      <p:sp>
-        <p:nvSpPr>
-          <p:cNvPr id="203" name="Google Shape;203;p19"/>
-          <p:cNvSpPr txBox="1"/>
-          <p:nvPr/>
-        </p:nvSpPr>
-        <p:spPr>
-          <a:xfrm>
-            <a:off x="4683174" y="3260824"/>
-            <a:ext cx="2967089" cy="333375"/>
-          </a:xfrm>
-          <a:prstGeom prst="rect">
-            <a:avLst/>
-          </a:prstGeom>
-          <a:noFill/>
-          <a:ln>
-            <a:noFill/>
-          </a:ln>
-        </p:spPr>
-        <p:txBody>
-          <a:bodyPr spcFirstLastPara="1" wrap="square" lIns="0" tIns="0" rIns="0" bIns="0" anchor="t" anchorCtr="0">
-            <a:spAutoFit/>
-          </a:bodyPr>
-          <a:lstStyle/>
-          <a:p>
-            <a:pPr marL="0" marR="0" lvl="0" indent="0" algn="l" rtl="0">
-              <a:spcBef>
-                <a:spcPts val="0"/>
-              </a:spcBef>
-              <a:spcAft>
-                <a:spcPts val="0"/>
-              </a:spcAft>
-              <a:buNone/>
-            </a:pPr>
-            <a:r>
-              <a:rPr lang="en-US" sz="1800" b="1" i="0" u="none" strike="noStrike" cap="none">
-                <a:solidFill>
-                  <a:srgbClr val="F8FAFC"/>
-                </a:solidFill>
-                <a:latin typeface="Poppins"/>
-                <a:ea typeface="Poppins"/>
-                <a:cs typeface="Poppins"/>
-                <a:sym typeface="Poppins"/>
-              </a:rPr>
-              <a:t>loadWeather...()</a:t>
-            </a:r>
-            <a:endParaRPr/>
-          </a:p>
-        </p:txBody>
-      </p:sp>
-      <p:sp>
-        <p:nvSpPr>
-          <p:cNvPr id="204" name="Google Shape;204;p19"/>
-          <p:cNvSpPr txBox="1"/>
-          <p:nvPr/>
-        </p:nvSpPr>
-        <p:spPr>
-          <a:xfrm>
-            <a:off x="4683174" y="3737074"/>
-            <a:ext cx="2825799" cy="1812726"/>
-          </a:xfrm>
-          <a:prstGeom prst="rect">
-            <a:avLst/>
-          </a:prstGeom>
-          <a:noFill/>
-          <a:ln>
-            <a:noFill/>
-          </a:ln>
-        </p:spPr>
-        <p:txBody>
-          <a:bodyPr spcFirstLastPara="1" wrap="square" lIns="0" tIns="0" rIns="0" bIns="0" anchor="t" anchorCtr="0">
-            <a:spAutoFit/>
-          </a:bodyPr>
-          <a:lstStyle/>
-          <a:p>
-            <a:pPr marL="0" marR="0" lvl="0" indent="0" algn="l" rtl="0">
-              <a:lnSpc>
-                <a:spcPct val="159921"/>
-              </a:lnSpc>
-              <a:spcBef>
-                <a:spcPts val="0"/>
-              </a:spcBef>
-              <a:spcAft>
-                <a:spcPts val="0"/>
-              </a:spcAft>
-              <a:buNone/>
-            </a:pPr>
-            <a:r>
-              <a:rPr lang="en-US" sz="1275" b="0" i="0" u="none" strike="noStrike" cap="none">
-                <a:solidFill>
-                  <a:srgbClr val="CBD5E1"/>
-                </a:solidFill>
-                <a:latin typeface="Inter"/>
-                <a:ea typeface="Inter"/>
-                <a:cs typeface="Inter"/>
-                <a:sym typeface="Inter"/>
-              </a:rPr>
-              <a:t>Housed in the </a:t>
-            </a:r>
-            <a:r>
-              <a:rPr lang="en-US" sz="1275" b="1" i="0" u="none" strike="noStrike" cap="none">
-                <a:solidFill>
-                  <a:srgbClr val="CBD5E1"/>
-                </a:solidFill>
-                <a:latin typeface="Inter"/>
-                <a:ea typeface="Inter"/>
-                <a:cs typeface="Inter"/>
-                <a:sym typeface="Inter"/>
-              </a:rPr>
-              <a:t>HomeViewModel</a:t>
-            </a:r>
-            <a:r>
-              <a:rPr lang="en-US" sz="1275" b="0" i="0" u="none" strike="noStrike" cap="none">
-                <a:solidFill>
-                  <a:srgbClr val="CBD5E1"/>
-                </a:solidFill>
-                <a:latin typeface="Inter"/>
-                <a:ea typeface="Inter"/>
-                <a:cs typeface="Inter"/>
-                <a:sym typeface="Inter"/>
-              </a:rPr>
-              <a:t>. Leverages Kotlin Coroutines via viewModelScope to fetch data asynchronously on background dispatchers, preventing any UI thread blocking or application stutter.</a:t>
-            </a:r>
-            <a:endParaRPr/>
-          </a:p>
-        </p:txBody>
-      </p:sp>
-      <p:sp>
-        <p:nvSpPr>
-          <p:cNvPr id="205" name="Google Shape;205;p19"/>
-          <p:cNvSpPr txBox="1"/>
-          <p:nvPr/>
-        </p:nvSpPr>
-        <p:spPr>
-          <a:xfrm>
-            <a:off x="8461474" y="3260824"/>
-            <a:ext cx="2967089" cy="333375"/>
-          </a:xfrm>
-          <a:prstGeom prst="rect">
-            <a:avLst/>
-          </a:prstGeom>
-          <a:noFill/>
-          <a:ln>
-            <a:noFill/>
-          </a:ln>
-        </p:spPr>
-        <p:txBody>
-          <a:bodyPr spcFirstLastPara="1" wrap="square" lIns="0" tIns="0" rIns="0" bIns="0" anchor="t" anchorCtr="0">
-            <a:spAutoFit/>
-          </a:bodyPr>
-          <a:lstStyle/>
-          <a:p>
-            <a:pPr marL="0" marR="0" lvl="0" indent="0" algn="l" rtl="0">
-              <a:spcBef>
-                <a:spcPts val="0"/>
-              </a:spcBef>
-              <a:spcAft>
-                <a:spcPts val="0"/>
-              </a:spcAft>
-              <a:buNone/>
-            </a:pPr>
-            <a:r>
-              <a:rPr lang="en-US" sz="1800" b="1" i="0" u="none" strike="noStrike" cap="none">
-                <a:solidFill>
-                  <a:srgbClr val="F8FAFC"/>
-                </a:solidFill>
-                <a:latin typeface="Poppins"/>
-                <a:ea typeface="Poppins"/>
-                <a:cs typeface="Poppins"/>
-                <a:sym typeface="Poppins"/>
-              </a:rPr>
-              <a:t>doWork()</a:t>
-            </a:r>
-            <a:endParaRPr/>
-          </a:p>
-        </p:txBody>
-      </p:sp>
-      <p:sp>
-        <p:nvSpPr>
-          <p:cNvPr id="206" name="Google Shape;206;p19"/>
-          <p:cNvSpPr txBox="1"/>
-          <p:nvPr/>
-        </p:nvSpPr>
-        <p:spPr>
-          <a:xfrm>
-            <a:off x="8461474" y="3737074"/>
-            <a:ext cx="2825799" cy="1553765"/>
-          </a:xfrm>
-          <a:prstGeom prst="rect">
-            <a:avLst/>
-          </a:prstGeom>
-          <a:noFill/>
-          <a:ln>
-            <a:noFill/>
-          </a:ln>
-        </p:spPr>
-        <p:txBody>
-          <a:bodyPr spcFirstLastPara="1" wrap="square" lIns="0" tIns="0" rIns="0" bIns="0" anchor="t" anchorCtr="0">
-            <a:spAutoFit/>
-          </a:bodyPr>
-          <a:lstStyle/>
-          <a:p>
-            <a:pPr marL="0" marR="0" lvl="0" indent="0" algn="l" rtl="0">
-              <a:lnSpc>
-                <a:spcPct val="159921"/>
-              </a:lnSpc>
-              <a:spcBef>
-                <a:spcPts val="0"/>
-              </a:spcBef>
-              <a:spcAft>
-                <a:spcPts val="0"/>
-              </a:spcAft>
-              <a:buNone/>
-            </a:pPr>
-            <a:r>
-              <a:rPr lang="en-US" sz="1275" b="0" i="0" u="none" strike="noStrike" cap="none">
-                <a:solidFill>
-                  <a:srgbClr val="CBD5E1"/>
-                </a:solidFill>
-                <a:latin typeface="Inter"/>
-                <a:ea typeface="Inter"/>
-                <a:cs typeface="Inter"/>
-                <a:sym typeface="Inter"/>
-              </a:rPr>
-              <a:t>Inside the </a:t>
-            </a:r>
-            <a:r>
-              <a:rPr lang="en-US" sz="1275" b="1" i="0" u="none" strike="noStrike" cap="none">
-                <a:solidFill>
-                  <a:srgbClr val="CBD5E1"/>
-                </a:solidFill>
-                <a:latin typeface="Inter"/>
-                <a:ea typeface="Inter"/>
-                <a:cs typeface="Inter"/>
-                <a:sym typeface="Inter"/>
-              </a:rPr>
-              <a:t>WeatherWorker</a:t>
-            </a:r>
-            <a:r>
-              <a:rPr lang="en-US" sz="1275" b="0" i="0" u="none" strike="noStrike" cap="none">
-                <a:solidFill>
-                  <a:srgbClr val="CBD5E1"/>
-                </a:solidFill>
-                <a:latin typeface="Inter"/>
-                <a:ea typeface="Inter"/>
-                <a:cs typeface="Inter"/>
-                <a:sym typeface="Inter"/>
-              </a:rPr>
-              <a:t> class. Demonstrates the power of WorkManager to execute critical background syncing, ensuring the user always wakes up to updated forecast data.</a:t>
-            </a:r>
-            <a:endParaRPr/>
-          </a:p>
-        </p:txBody>
-      </p:sp>
-      <p:pic>
-        <p:nvPicPr>
-          <p:cNvPr id="207" name="Google Shape;207;p19" descr="image.png"/>
-          <p:cNvPicPr preferRelativeResize="0"/>
-          <p:nvPr/>
-        </p:nvPicPr>
-        <p:blipFill rotWithShape="1">
-          <a:blip r:embed="rId6">
-            <a:alphaModFix/>
-          </a:blip>
-          <a:srcRect/>
-          <a:stretch/>
-        </p:blipFill>
-        <p:spPr>
-          <a:xfrm>
-            <a:off x="904875" y="2555974"/>
-            <a:ext cx="457200" cy="457200"/>
-          </a:xfrm>
-          <a:prstGeom prst="rect">
-            <a:avLst/>
-          </a:prstGeom>
-          <a:noFill/>
-          <a:ln>
-            <a:noFill/>
-          </a:ln>
-        </p:spPr>
-      </p:pic>
-      <p:pic>
-        <p:nvPicPr>
-          <p:cNvPr id="208" name="Google Shape;208;p19" descr="image.png"/>
-          <p:cNvPicPr preferRelativeResize="0"/>
-          <p:nvPr/>
-        </p:nvPicPr>
-        <p:blipFill rotWithShape="1">
-          <a:blip r:embed="rId7">
-            <a:alphaModFix/>
-          </a:blip>
-          <a:srcRect/>
-          <a:stretch/>
-        </p:blipFill>
-        <p:spPr>
-          <a:xfrm>
-            <a:off x="4683174" y="2555974"/>
-            <a:ext cx="400050" cy="457200"/>
-          </a:xfrm>
-          <a:prstGeom prst="rect">
-            <a:avLst/>
-          </a:prstGeom>
-          <a:noFill/>
-          <a:ln>
-            <a:noFill/>
-          </a:ln>
-        </p:spPr>
-      </p:pic>
-      <p:pic>
-        <p:nvPicPr>
-          <p:cNvPr id="209" name="Google Shape;209;p19" descr="image.png"/>
-          <p:cNvPicPr preferRelativeResize="0"/>
-          <p:nvPr/>
-        </p:nvPicPr>
-        <p:blipFill rotWithShape="1">
-          <a:blip r:embed="rId8">
-            <a:alphaModFix/>
-          </a:blip>
-          <a:srcRect/>
-          <a:stretch/>
-        </p:blipFill>
-        <p:spPr>
-          <a:xfrm>
-            <a:off x="8461474" y="2555974"/>
-            <a:ext cx="571500" cy="457200"/>
-          </a:xfrm>
-          <a:prstGeom prst="rect">
-            <a:avLst/>
-          </a:prstGeom>
-          <a:noFill/>
-          <a:ln>
-            <a:noFill/>
-          </a:ln>
-        </p:spPr>
-      </p:pic>
-    </p:spTree>
-  </p:cSld>
-  <p:clrMapOvr>
-    <a:masterClrMapping/>
-  </p:clrMapOvr>
-</p:sld>
-</file>
-
-<file path=ppt/slides/slide8.xml><?xml version="1.0" encoding="utf-8"?>
-<p:sld xmlns:a="http://schemas.openxmlformats.org/drawingml/2006/main" xmlns:r="http://schemas.openxmlformats.org/officeDocument/2006/relationships" xmlns:p="http://schemas.openxmlformats.org/presentationml/2006/main">
-  <p:cSld>
-    <p:bg>
-      <p:bgPr>
-        <a:solidFill>
-          <a:srgbClr val="0F172A"/>
-        </a:solidFill>
-        <a:effectLst/>
-      </p:bgPr>
-    </p:bg>
-    <p:spTree>
-      <p:nvGrpSpPr>
-        <p:cNvPr id="1" name="Shape 213"/>
-        <p:cNvGrpSpPr/>
-        <p:nvPr/>
-      </p:nvGrpSpPr>
-      <p:grpSpPr>
-        <a:xfrm>
-          <a:off x="0" y="0"/>
-          <a:ext cx="0" cy="0"/>
-          <a:chOff x="0" y="0"/>
-          <a:chExt cx="0" cy="0"/>
-        </a:xfrm>
-      </p:grpSpPr>
-      <p:pic>
-        <p:nvPicPr>
-          <p:cNvPr id="214" name="Google Shape;214;p20" descr="image.png"/>
-          <p:cNvPicPr preferRelativeResize="0"/>
-          <p:nvPr/>
-        </p:nvPicPr>
-        <p:blipFill rotWithShape="1">
-          <a:blip r:embed="rId3">
-            <a:alphaModFix/>
-          </a:blip>
-          <a:srcRect/>
-          <a:stretch/>
-        </p:blipFill>
-        <p:spPr>
-          <a:xfrm>
-            <a:off x="571500" y="2052637"/>
-            <a:ext cx="3492549" cy="3914775"/>
-          </a:xfrm>
-          <a:prstGeom prst="rect">
-            <a:avLst/>
-          </a:prstGeom>
-          <a:noFill/>
-          <a:ln>
-            <a:noFill/>
-          </a:ln>
-        </p:spPr>
-      </p:pic>
-      <p:pic>
-        <p:nvPicPr>
-          <p:cNvPr id="215" name="Google Shape;215;p20" descr="image.png"/>
-          <p:cNvPicPr preferRelativeResize="0"/>
-          <p:nvPr/>
-        </p:nvPicPr>
-        <p:blipFill rotWithShape="1">
-          <a:blip r:embed="rId4">
-            <a:alphaModFix/>
-          </a:blip>
-          <a:srcRect/>
-          <a:stretch/>
-        </p:blipFill>
-        <p:spPr>
-          <a:xfrm>
-            <a:off x="4349799" y="2052637"/>
-            <a:ext cx="3492549" cy="3914775"/>
-          </a:xfrm>
-          <a:prstGeom prst="rect">
-            <a:avLst/>
-          </a:prstGeom>
-          <a:noFill/>
-          <a:ln>
-            <a:noFill/>
-          </a:ln>
-        </p:spPr>
-      </p:pic>
-      <p:pic>
-        <p:nvPicPr>
-          <p:cNvPr id="216" name="Google Shape;216;p20" descr="image.png"/>
-          <p:cNvPicPr preferRelativeResize="0"/>
-          <p:nvPr/>
-        </p:nvPicPr>
-        <p:blipFill rotWithShape="1">
-          <a:blip r:embed="rId5">
-            <a:alphaModFix/>
-          </a:blip>
-          <a:srcRect/>
-          <a:stretch/>
-        </p:blipFill>
-        <p:spPr>
-          <a:xfrm>
-            <a:off x="8128099" y="2052637"/>
-            <a:ext cx="3492549" cy="3914775"/>
-          </a:xfrm>
-          <a:prstGeom prst="rect">
-            <a:avLst/>
-          </a:prstGeom>
-          <a:noFill/>
-          <a:ln>
-            <a:noFill/>
-          </a:ln>
-        </p:spPr>
-      </p:pic>
-      <p:pic>
-        <p:nvPicPr>
-          <p:cNvPr id="217" name="Google Shape;217;p20" descr="image.png"/>
-          <p:cNvPicPr preferRelativeResize="0"/>
-          <p:nvPr/>
-        </p:nvPicPr>
-        <p:blipFill rotWithShape="1">
-          <a:blip r:embed="rId6">
-            <a:alphaModFix/>
-          </a:blip>
-          <a:srcRect/>
-          <a:stretch/>
-        </p:blipFill>
-        <p:spPr>
-          <a:xfrm>
-            <a:off x="571500" y="2052637"/>
-            <a:ext cx="3492549" cy="2095500"/>
-          </a:xfrm>
-          <a:prstGeom prst="rect">
-            <a:avLst/>
-          </a:prstGeom>
-          <a:noFill/>
-          <a:ln>
-            <a:noFill/>
-          </a:ln>
-        </p:spPr>
-      </p:pic>
-      <p:pic>
-        <p:nvPicPr>
-          <p:cNvPr id="218" name="Google Shape;218;p20" descr="image.png"/>
-          <p:cNvPicPr preferRelativeResize="0"/>
-          <p:nvPr/>
-        </p:nvPicPr>
-        <p:blipFill rotWithShape="1">
-          <a:blip r:embed="rId7">
-            <a:alphaModFix/>
-          </a:blip>
-          <a:srcRect/>
-          <a:stretch/>
-        </p:blipFill>
-        <p:spPr>
-          <a:xfrm>
-            <a:off x="4349799" y="2052637"/>
-            <a:ext cx="3492549" cy="2095500"/>
-          </a:xfrm>
-          <a:prstGeom prst="rect">
-            <a:avLst/>
-          </a:prstGeom>
-          <a:noFill/>
-          <a:ln>
-            <a:noFill/>
-          </a:ln>
-        </p:spPr>
-      </p:pic>
-      <p:pic>
-        <p:nvPicPr>
-          <p:cNvPr id="219" name="Google Shape;219;p20" descr="image.png"/>
-          <p:cNvPicPr preferRelativeResize="0"/>
-          <p:nvPr/>
-        </p:nvPicPr>
-        <p:blipFill rotWithShape="1">
-          <a:blip r:embed="rId8">
-            <a:alphaModFix/>
-          </a:blip>
-          <a:srcRect/>
-          <a:stretch/>
-        </p:blipFill>
-        <p:spPr>
-          <a:xfrm>
-            <a:off x="8128099" y="2052637"/>
-            <a:ext cx="3492549" cy="2095500"/>
-          </a:xfrm>
-          <a:prstGeom prst="rect">
-            <a:avLst/>
-          </a:prstGeom>
-          <a:noFill/>
-          <a:ln>
-            <a:noFill/>
-          </a:ln>
-        </p:spPr>
-      </p:pic>
-      <p:sp>
-        <p:nvSpPr>
-          <p:cNvPr id="220" name="Google Shape;220;p20"/>
-          <p:cNvSpPr txBox="1"/>
-          <p:nvPr/>
-        </p:nvSpPr>
-        <p:spPr>
-          <a:xfrm>
-            <a:off x="571500" y="571500"/>
-            <a:ext cx="11601450" cy="638175"/>
-          </a:xfrm>
-          <a:prstGeom prst="rect">
-            <a:avLst/>
-          </a:prstGeom>
-          <a:noFill/>
-          <a:ln>
-            <a:noFill/>
-          </a:ln>
-        </p:spPr>
-        <p:txBody>
-          <a:bodyPr spcFirstLastPara="1" wrap="square" lIns="0" tIns="0" rIns="0" bIns="0" anchor="t" anchorCtr="0">
-            <a:spAutoFit/>
-          </a:bodyPr>
-          <a:lstStyle/>
-          <a:p>
-            <a:pPr marL="0" marR="0" lvl="0" indent="0" algn="l" rtl="0">
-              <a:spcBef>
-                <a:spcPts val="0"/>
-              </a:spcBef>
-              <a:spcAft>
-                <a:spcPts val="0"/>
-              </a:spcAft>
-              <a:buNone/>
-            </a:pPr>
-            <a:r>
-              <a:rPr lang="en-US" sz="3300" b="1" i="0" u="none" strike="noStrike" cap="none">
-                <a:solidFill>
-                  <a:srgbClr val="F8FAFC"/>
-                </a:solidFill>
-                <a:latin typeface="Poppins"/>
-                <a:ea typeface="Poppins"/>
-                <a:cs typeface="Poppins"/>
-                <a:sym typeface="Poppins"/>
-              </a:rPr>
-              <a:t>Advanced </a:t>
-            </a:r>
-            <a:r>
-              <a:rPr lang="en-US" sz="3300" b="1" i="0" u="none" strike="noStrike" cap="none">
-                <a:solidFill>
-                  <a:srgbClr val="38BDF8"/>
-                </a:solidFill>
-                <a:latin typeface="Poppins"/>
-                <a:ea typeface="Poppins"/>
-                <a:cs typeface="Poppins"/>
-                <a:sym typeface="Poppins"/>
-              </a:rPr>
-              <a:t>Features</a:t>
-            </a:r>
-            <a:endParaRPr/>
-          </a:p>
-        </p:txBody>
-      </p:sp>
-      <p:sp>
-        <p:nvSpPr>
-          <p:cNvPr id="221" name="Google Shape;221;p20"/>
-          <p:cNvSpPr/>
-          <p:nvPr/>
-        </p:nvSpPr>
-        <p:spPr>
-          <a:xfrm>
-            <a:off x="571500" y="1333500"/>
-            <a:ext cx="11049000" cy="19050"/>
-          </a:xfrm>
-          <a:prstGeom prst="rect">
-            <a:avLst/>
-          </a:prstGeom>
-          <a:solidFill>
-            <a:srgbClr val="1E293B"/>
-          </a:solidFill>
-          <a:ln>
-            <a:noFill/>
-          </a:ln>
-        </p:spPr>
-        <p:txBody>
-          <a:bodyPr spcFirstLastPara="1" wrap="square" lIns="91425" tIns="45700" rIns="91425" bIns="45700" anchor="ctr" anchorCtr="0">
-            <a:noAutofit/>
-          </a:bodyPr>
-          <a:lstStyle/>
-          <a:p>
-            <a:pPr marL="0" marR="0" lvl="0" indent="0" algn="ctr" rtl="0">
-              <a:spcBef>
-                <a:spcPts val="0"/>
-              </a:spcBef>
-              <a:spcAft>
-                <a:spcPts val="0"/>
-              </a:spcAft>
-              <a:buNone/>
-            </a:pPr>
-            <a:endParaRPr sz="1800" b="0" i="0" u="none" strike="noStrike" cap="none">
-              <a:solidFill>
-                <a:schemeClr val="dk1"/>
-              </a:solidFill>
-              <a:latin typeface="Calibri"/>
-              <a:ea typeface="Calibri"/>
-              <a:cs typeface="Calibri"/>
-              <a:sym typeface="Calibri"/>
-            </a:endParaRPr>
-          </a:p>
-        </p:txBody>
-      </p:sp>
-      <p:sp>
-        <p:nvSpPr>
-          <p:cNvPr id="222" name="Google Shape;222;p20"/>
-          <p:cNvSpPr txBox="1"/>
-          <p:nvPr/>
-        </p:nvSpPr>
-        <p:spPr>
-          <a:xfrm>
-            <a:off x="809625" y="4386262"/>
-            <a:ext cx="3167114" cy="314325"/>
-          </a:xfrm>
-          <a:prstGeom prst="rect">
-            <a:avLst/>
-          </a:prstGeom>
-          <a:noFill/>
-          <a:ln>
-            <a:noFill/>
-          </a:ln>
-        </p:spPr>
-        <p:txBody>
-          <a:bodyPr spcFirstLastPara="1" wrap="square" lIns="0" tIns="0" rIns="0" bIns="0" anchor="t" anchorCtr="0">
-            <a:spAutoFit/>
-          </a:bodyPr>
-          <a:lstStyle/>
-          <a:p>
-            <a:pPr marL="0" marR="0" lvl="0" indent="0" algn="l" rtl="0">
-              <a:spcBef>
-                <a:spcPts val="0"/>
-              </a:spcBef>
-              <a:spcAft>
-                <a:spcPts val="0"/>
-              </a:spcAft>
-              <a:buNone/>
-            </a:pPr>
-            <a:r>
-              <a:rPr lang="en-US" sz="1650" b="1" i="0" u="none" strike="noStrike" cap="none">
-                <a:solidFill>
-                  <a:srgbClr val="38BDF8"/>
-                </a:solidFill>
-                <a:latin typeface="Poppins"/>
-                <a:ea typeface="Poppins"/>
-                <a:cs typeface="Poppins"/>
-                <a:sym typeface="Poppins"/>
-              </a:rPr>
-              <a:t>Background Updates</a:t>
-            </a:r>
-            <a:endParaRPr/>
-          </a:p>
-        </p:txBody>
-      </p:sp>
-      <p:sp>
-        <p:nvSpPr>
-          <p:cNvPr id="223" name="Google Shape;223;p20"/>
-          <p:cNvSpPr txBox="1"/>
-          <p:nvPr/>
-        </p:nvSpPr>
-        <p:spPr>
-          <a:xfrm>
-            <a:off x="809625" y="4814887"/>
-            <a:ext cx="3016299" cy="914400"/>
-          </a:xfrm>
-          <a:prstGeom prst="rect">
-            <a:avLst/>
-          </a:prstGeom>
-          <a:noFill/>
-          <a:ln>
-            <a:noFill/>
-          </a:ln>
-        </p:spPr>
-        <p:txBody>
-          <a:bodyPr spcFirstLastPara="1" wrap="square" lIns="0" tIns="0" rIns="0" bIns="0" anchor="t" anchorCtr="0">
-            <a:spAutoFit/>
-          </a:bodyPr>
-          <a:lstStyle/>
-          <a:p>
-            <a:pPr marL="0" marR="0" lvl="0" indent="0" algn="l" rtl="0">
-              <a:lnSpc>
-                <a:spcPct val="150000"/>
-              </a:lnSpc>
-              <a:spcBef>
-                <a:spcPts val="0"/>
-              </a:spcBef>
-              <a:spcAft>
-                <a:spcPts val="0"/>
-              </a:spcAft>
-              <a:buNone/>
-            </a:pPr>
-            <a:r>
-              <a:rPr lang="en-US" sz="1200" b="0" i="0" u="none" strike="noStrike" cap="none">
-                <a:solidFill>
-                  <a:srgbClr val="CBD5E1"/>
-                </a:solidFill>
-                <a:latin typeface="Inter"/>
-                <a:ea typeface="Inter"/>
-                <a:cs typeface="Inter"/>
-                <a:sym typeface="Inter"/>
-              </a:rPr>
-              <a:t>Utilizes Android's WorkManager for periodic background syncing, optimizing battery usage while keeping data perfectly fresh.</a:t>
-            </a:r>
-            <a:endParaRPr/>
-          </a:p>
-        </p:txBody>
-      </p:sp>
-      <p:pic>
-        <p:nvPicPr>
-          <p:cNvPr id="224" name="Google Shape;224;p20" descr="image.png"/>
-          <p:cNvPicPr preferRelativeResize="0"/>
-          <p:nvPr/>
-        </p:nvPicPr>
-        <p:blipFill rotWithShape="1">
-          <a:blip r:embed="rId9">
-            <a:alphaModFix/>
-          </a:blip>
-          <a:srcRect/>
-          <a:stretch/>
-        </p:blipFill>
-        <p:spPr>
-          <a:xfrm>
-            <a:off x="4349799" y="2052637"/>
-            <a:ext cx="3492549" cy="2095500"/>
-          </a:xfrm>
-          <a:prstGeom prst="rect">
-            <a:avLst/>
-          </a:prstGeom>
-          <a:noFill/>
-          <a:ln>
-            <a:noFill/>
-          </a:ln>
-        </p:spPr>
-      </p:pic>
-      <p:sp>
-        <p:nvSpPr>
-          <p:cNvPr id="225" name="Google Shape;225;p20"/>
-          <p:cNvSpPr txBox="1"/>
-          <p:nvPr/>
-        </p:nvSpPr>
-        <p:spPr>
-          <a:xfrm>
-            <a:off x="4587924" y="4386262"/>
-            <a:ext cx="3167114" cy="314325"/>
-          </a:xfrm>
-          <a:prstGeom prst="rect">
-            <a:avLst/>
-          </a:prstGeom>
-          <a:noFill/>
-          <a:ln>
-            <a:noFill/>
-          </a:ln>
-        </p:spPr>
-        <p:txBody>
-          <a:bodyPr spcFirstLastPara="1" wrap="square" lIns="0" tIns="0" rIns="0" bIns="0" anchor="t" anchorCtr="0">
-            <a:spAutoFit/>
-          </a:bodyPr>
-          <a:lstStyle/>
-          <a:p>
-            <a:pPr marL="0" marR="0" lvl="0" indent="0" algn="l" rtl="0">
-              <a:spcBef>
-                <a:spcPts val="0"/>
-              </a:spcBef>
-              <a:spcAft>
-                <a:spcPts val="0"/>
-              </a:spcAft>
-              <a:buNone/>
-            </a:pPr>
-            <a:r>
-              <a:rPr lang="en-US" sz="1650" b="1" i="0" u="none" strike="noStrike" cap="none">
-                <a:solidFill>
-                  <a:srgbClr val="38BDF8"/>
-                </a:solidFill>
-                <a:latin typeface="Poppins"/>
-                <a:ea typeface="Poppins"/>
-                <a:cs typeface="Poppins"/>
-                <a:sym typeface="Poppins"/>
-              </a:rPr>
-              <a:t>Location Services</a:t>
-            </a:r>
-            <a:endParaRPr/>
-          </a:p>
-        </p:txBody>
-      </p:sp>
-      <p:sp>
-        <p:nvSpPr>
-          <p:cNvPr id="226" name="Google Shape;226;p20"/>
-          <p:cNvSpPr txBox="1"/>
-          <p:nvPr/>
-        </p:nvSpPr>
-        <p:spPr>
-          <a:xfrm>
-            <a:off x="4587924" y="4814887"/>
-            <a:ext cx="3016299" cy="914400"/>
-          </a:xfrm>
-          <a:prstGeom prst="rect">
-            <a:avLst/>
-          </a:prstGeom>
-          <a:noFill/>
-          <a:ln>
-            <a:noFill/>
-          </a:ln>
-        </p:spPr>
-        <p:txBody>
-          <a:bodyPr spcFirstLastPara="1" wrap="square" lIns="0" tIns="0" rIns="0" bIns="0" anchor="t" anchorCtr="0">
-            <a:spAutoFit/>
-          </a:bodyPr>
-          <a:lstStyle/>
-          <a:p>
-            <a:pPr marL="0" marR="0" lvl="0" indent="0" algn="l" rtl="0">
-              <a:lnSpc>
-                <a:spcPct val="150000"/>
-              </a:lnSpc>
-              <a:spcBef>
-                <a:spcPts val="0"/>
-              </a:spcBef>
-              <a:spcAft>
-                <a:spcPts val="0"/>
-              </a:spcAft>
-              <a:buNone/>
-            </a:pPr>
-            <a:r>
-              <a:rPr lang="en-US" sz="1200" b="0" i="0" u="none" strike="noStrike" cap="none">
-                <a:solidFill>
-                  <a:srgbClr val="CBD5E1"/>
-                </a:solidFill>
-                <a:latin typeface="Inter"/>
-                <a:ea typeface="Inter"/>
-                <a:cs typeface="Inter"/>
-                <a:sym typeface="Inter"/>
-              </a:rPr>
-              <a:t>Deep integration with Google Play Services to automatically and accurately detect the user's current city based on device sensors.</a:t>
-            </a:r>
-            <a:endParaRPr/>
-          </a:p>
-        </p:txBody>
-      </p:sp>
-      <p:pic>
-        <p:nvPicPr>
-          <p:cNvPr id="227" name="Google Shape;227;p20"/>
-          <p:cNvPicPr preferRelativeResize="0"/>
-          <p:nvPr/>
-        </p:nvPicPr>
-        <p:blipFill rotWithShape="1">
-          <a:blip r:embed="rId10">
-            <a:alphaModFix/>
-          </a:blip>
-          <a:srcRect t="19998" b="20004"/>
-          <a:stretch/>
-        </p:blipFill>
-        <p:spPr>
-          <a:xfrm>
-            <a:off x="8128099" y="2052637"/>
-            <a:ext cx="3492549" cy="2095500"/>
-          </a:xfrm>
-          <a:prstGeom prst="rect">
-            <a:avLst/>
-          </a:prstGeom>
-          <a:noFill/>
-          <a:ln>
-            <a:noFill/>
-          </a:ln>
-        </p:spPr>
-      </p:pic>
-      <p:sp>
-        <p:nvSpPr>
-          <p:cNvPr id="228" name="Google Shape;228;p20"/>
-          <p:cNvSpPr txBox="1"/>
-          <p:nvPr/>
-        </p:nvSpPr>
-        <p:spPr>
-          <a:xfrm>
-            <a:off x="8366224" y="4386262"/>
-            <a:ext cx="3167114" cy="314325"/>
-          </a:xfrm>
-          <a:prstGeom prst="rect">
-            <a:avLst/>
-          </a:prstGeom>
-          <a:noFill/>
-          <a:ln>
-            <a:noFill/>
-          </a:ln>
-        </p:spPr>
-        <p:txBody>
-          <a:bodyPr spcFirstLastPara="1" wrap="square" lIns="0" tIns="0" rIns="0" bIns="0" anchor="t" anchorCtr="0">
-            <a:spAutoFit/>
-          </a:bodyPr>
-          <a:lstStyle/>
-          <a:p>
-            <a:pPr marL="0" marR="0" lvl="0" indent="0" algn="l" rtl="0">
-              <a:spcBef>
-                <a:spcPts val="0"/>
-              </a:spcBef>
-              <a:spcAft>
-                <a:spcPts val="0"/>
-              </a:spcAft>
-              <a:buNone/>
-            </a:pPr>
-            <a:r>
-              <a:rPr lang="en-US" sz="1650" b="1" i="0" u="none" strike="noStrike" cap="none">
-                <a:solidFill>
-                  <a:srgbClr val="38BDF8"/>
-                </a:solidFill>
-                <a:latin typeface="Poppins"/>
-                <a:ea typeface="Poppins"/>
-                <a:cs typeface="Poppins"/>
-                <a:sym typeface="Poppins"/>
-              </a:rPr>
-              <a:t>Modern UI &amp; Firebase</a:t>
-            </a:r>
-            <a:endParaRPr/>
-          </a:p>
-        </p:txBody>
-      </p:sp>
-      <p:sp>
-        <p:nvSpPr>
-          <p:cNvPr id="229" name="Google Shape;229;p20"/>
-          <p:cNvSpPr txBox="1"/>
-          <p:nvPr/>
-        </p:nvSpPr>
-        <p:spPr>
-          <a:xfrm>
-            <a:off x="8366224" y="4814887"/>
-            <a:ext cx="3016299" cy="914400"/>
-          </a:xfrm>
-          <a:prstGeom prst="rect">
-            <a:avLst/>
-          </a:prstGeom>
-          <a:noFill/>
-          <a:ln>
-            <a:noFill/>
-          </a:ln>
-        </p:spPr>
-        <p:txBody>
-          <a:bodyPr spcFirstLastPara="1" wrap="square" lIns="0" tIns="0" rIns="0" bIns="0" anchor="t" anchorCtr="0">
-            <a:spAutoFit/>
-          </a:bodyPr>
-          <a:lstStyle/>
-          <a:p>
-            <a:pPr marL="0" marR="0" lvl="0" indent="0" algn="l" rtl="0">
-              <a:lnSpc>
-                <a:spcPct val="150000"/>
-              </a:lnSpc>
-              <a:spcBef>
-                <a:spcPts val="0"/>
-              </a:spcBef>
-              <a:spcAft>
-                <a:spcPts val="0"/>
-              </a:spcAft>
-              <a:buNone/>
-            </a:pPr>
-            <a:r>
-              <a:rPr lang="en-US" sz="1200" b="0" i="0" u="none" strike="noStrike" cap="none">
-                <a:solidFill>
-                  <a:srgbClr val="CBD5E1"/>
-                </a:solidFill>
-                <a:latin typeface="Inter"/>
-                <a:ea typeface="Inter"/>
-                <a:cs typeface="Inter"/>
-                <a:sym typeface="Inter"/>
-              </a:rPr>
-              <a:t>Features fluid Motion animations, Material 3 design principles, and a robust Firebase login system for cloud preference storage.</a:t>
-            </a:r>
-            <a:endParaRPr/>
-          </a:p>
-        </p:txBody>
-      </p:sp>
-      <p:pic>
-        <p:nvPicPr>
-          <p:cNvPr id="230" name="Google Shape;230;p20"/>
-          <p:cNvPicPr preferRelativeResize="0"/>
-          <p:nvPr/>
-        </p:nvPicPr>
-        <p:blipFill>
-          <a:blip r:embed="rId11">
-            <a:alphaModFix/>
-          </a:blip>
-          <a:stretch>
-            <a:fillRect/>
-          </a:stretch>
-        </p:blipFill>
-        <p:spPr>
-          <a:xfrm>
-            <a:off x="571500" y="2075150"/>
-            <a:ext cx="3492551" cy="2017150"/>
-          </a:xfrm>
-          <a:prstGeom prst="rect">
-            <a:avLst/>
-          </a:prstGeom>
-          <a:noFill/>
-          <a:ln>
-            <a:noFill/>
-          </a:ln>
-        </p:spPr>
-      </p:pic>
-      <p:pic>
-        <p:nvPicPr>
-          <p:cNvPr id="231" name="Google Shape;231;p20"/>
-          <p:cNvPicPr preferRelativeResize="0"/>
-          <p:nvPr/>
-        </p:nvPicPr>
-        <p:blipFill>
-          <a:blip r:embed="rId12">
-            <a:alphaModFix/>
-          </a:blip>
-          <a:stretch>
-            <a:fillRect/>
-          </a:stretch>
-        </p:blipFill>
-        <p:spPr>
-          <a:xfrm>
-            <a:off x="4349800" y="2075150"/>
-            <a:ext cx="3492550" cy="2017150"/>
-          </a:xfrm>
-          <a:prstGeom prst="rect">
-            <a:avLst/>
-          </a:prstGeom>
-          <a:noFill/>
-          <a:ln>
-            <a:noFill/>
-          </a:ln>
-        </p:spPr>
-      </p:pic>
-    </p:spTree>
-  </p:cSld>
-  <p:clrMapOvr>
-    <a:masterClrMapping/>
-  </p:clrMapOvr>
-</p:sld>
-</file>
-
-<file path=ppt/slides/slide9.xml><?xml version="1.0" encoding="utf-8"?>
-<p:sld xmlns:a="http://schemas.openxmlformats.org/drawingml/2006/main" xmlns:r="http://schemas.openxmlformats.org/officeDocument/2006/relationships" xmlns:p="http://schemas.openxmlformats.org/presentationml/2006/main">
-  <p:cSld>
-    <p:bg>
-      <p:bgPr>
-        <a:solidFill>
-          <a:srgbClr val="0F172A"/>
-        </a:solidFill>
-        <a:effectLst/>
-      </p:bgPr>
-    </p:bg>
-    <p:spTree>
-      <p:nvGrpSpPr>
-        <p:cNvPr id="1" name="Shape 235"/>
-        <p:cNvGrpSpPr/>
-        <p:nvPr/>
-      </p:nvGrpSpPr>
-      <p:grpSpPr>
-        <a:xfrm>
-          <a:off x="0" y="0"/>
-          <a:ext cx="0" cy="0"/>
-          <a:chOff x="0" y="0"/>
-          <a:chExt cx="0" cy="0"/>
-        </a:xfrm>
-      </p:grpSpPr>
-      <p:pic>
-        <p:nvPicPr>
-          <p:cNvPr id="236" name="Google Shape;236;p21" descr="image.png"/>
-          <p:cNvPicPr preferRelativeResize="0"/>
-          <p:nvPr/>
-        </p:nvPicPr>
-        <p:blipFill rotWithShape="1">
-          <a:blip r:embed="rId3">
-            <a:alphaModFix/>
-          </a:blip>
-          <a:srcRect/>
-          <a:stretch/>
-        </p:blipFill>
-        <p:spPr>
-          <a:xfrm>
-            <a:off x="571500" y="1939379"/>
-            <a:ext cx="5334000" cy="4141291"/>
-          </a:xfrm>
-          <a:prstGeom prst="rect">
-            <a:avLst/>
-          </a:prstGeom>
-          <a:noFill/>
-          <a:ln>
-            <a:noFill/>
-          </a:ln>
-        </p:spPr>
-      </p:pic>
-      <p:pic>
-        <p:nvPicPr>
-          <p:cNvPr id="237" name="Google Shape;237;p21" descr="image.png"/>
-          <p:cNvPicPr preferRelativeResize="0"/>
-          <p:nvPr/>
-        </p:nvPicPr>
-        <p:blipFill rotWithShape="1">
-          <a:blip r:embed="rId3">
-            <a:alphaModFix/>
-          </a:blip>
-          <a:srcRect/>
-          <a:stretch/>
-        </p:blipFill>
-        <p:spPr>
-          <a:xfrm>
-            <a:off x="6286500" y="1939379"/>
-            <a:ext cx="5334000" cy="4141291"/>
-          </a:xfrm>
-          <a:prstGeom prst="rect">
-            <a:avLst/>
-          </a:prstGeom>
-          <a:noFill/>
-          <a:ln>
-            <a:noFill/>
-          </a:ln>
-        </p:spPr>
-      </p:pic>
-      <p:sp>
-        <p:nvSpPr>
-          <p:cNvPr id="238" name="Google Shape;238;p21"/>
-          <p:cNvSpPr txBox="1"/>
-          <p:nvPr/>
-        </p:nvSpPr>
-        <p:spPr>
-          <a:xfrm>
-            <a:off x="571500" y="571500"/>
-            <a:ext cx="11601450" cy="638175"/>
-          </a:xfrm>
-          <a:prstGeom prst="rect">
-            <a:avLst/>
-          </a:prstGeom>
-          <a:noFill/>
-          <a:ln>
-            <a:noFill/>
-          </a:ln>
-        </p:spPr>
-        <p:txBody>
-          <a:bodyPr spcFirstLastPara="1" wrap="square" lIns="0" tIns="0" rIns="0" bIns="0" anchor="t" anchorCtr="0">
-            <a:spAutoFit/>
-          </a:bodyPr>
-          <a:lstStyle/>
-          <a:p>
-            <a:pPr marL="0" marR="0" lvl="0" indent="0" algn="l" rtl="0">
-              <a:spcBef>
-                <a:spcPts val="0"/>
-              </a:spcBef>
-              <a:spcAft>
-                <a:spcPts val="0"/>
-              </a:spcAft>
-              <a:buNone/>
-            </a:pPr>
-            <a:r>
-              <a:rPr lang="en-US" sz="3300" b="1" i="0" u="none" strike="noStrike" cap="none">
-                <a:solidFill>
-                  <a:srgbClr val="F8FAFC"/>
-                </a:solidFill>
-                <a:latin typeface="Poppins"/>
-                <a:ea typeface="Poppins"/>
-                <a:cs typeface="Poppins"/>
-                <a:sym typeface="Poppins"/>
-              </a:rPr>
-              <a:t>Challenges &amp; </a:t>
-            </a:r>
-            <a:r>
-              <a:rPr lang="en-US" sz="3300" b="1" i="0" u="none" strike="noStrike" cap="none">
-                <a:solidFill>
-                  <a:srgbClr val="38BDF8"/>
-                </a:solidFill>
-                <a:latin typeface="Poppins"/>
-                <a:ea typeface="Poppins"/>
-                <a:cs typeface="Poppins"/>
-                <a:sym typeface="Poppins"/>
-              </a:rPr>
-              <a:t>Solutions</a:t>
-            </a:r>
-            <a:endParaRPr/>
-          </a:p>
-        </p:txBody>
-      </p:sp>
-      <p:sp>
-        <p:nvSpPr>
-          <p:cNvPr id="239" name="Google Shape;239;p21"/>
-          <p:cNvSpPr/>
-          <p:nvPr/>
-        </p:nvSpPr>
-        <p:spPr>
-          <a:xfrm>
-            <a:off x="571500" y="1333500"/>
-            <a:ext cx="11049000" cy="19050"/>
-          </a:xfrm>
-          <a:prstGeom prst="rect">
-            <a:avLst/>
-          </a:prstGeom>
-          <a:solidFill>
-            <a:srgbClr val="1E293B"/>
-          </a:solidFill>
-          <a:ln>
-            <a:noFill/>
-          </a:ln>
-        </p:spPr>
-        <p:txBody>
-          <a:bodyPr spcFirstLastPara="1" wrap="square" lIns="91425" tIns="45700" rIns="91425" bIns="45700" anchor="ctr" anchorCtr="0">
-            <a:noAutofit/>
-          </a:bodyPr>
-          <a:lstStyle/>
-          <a:p>
-            <a:pPr marL="0" marR="0" lvl="0" indent="0" algn="ctr" rtl="0">
-              <a:spcBef>
-                <a:spcPts val="0"/>
-              </a:spcBef>
-              <a:spcAft>
-                <a:spcPts val="0"/>
-              </a:spcAft>
-              <a:buNone/>
-            </a:pPr>
-            <a:endParaRPr sz="1800" b="0" i="0" u="none" strike="noStrike" cap="none">
-              <a:solidFill>
-                <a:schemeClr val="dk1"/>
-              </a:solidFill>
-              <a:latin typeface="Calibri"/>
-              <a:ea typeface="Calibri"/>
-              <a:cs typeface="Calibri"/>
-              <a:sym typeface="Calibri"/>
-            </a:endParaRPr>
-          </a:p>
-        </p:txBody>
-      </p:sp>
-      <p:sp>
-        <p:nvSpPr>
-          <p:cNvPr id="240" name="Google Shape;240;p21"/>
-          <p:cNvSpPr txBox="1"/>
-          <p:nvPr/>
-        </p:nvSpPr>
-        <p:spPr>
-          <a:xfrm>
-            <a:off x="1009650" y="2320379"/>
-            <a:ext cx="4740592" cy="438150"/>
-          </a:xfrm>
-          <a:prstGeom prst="rect">
-            <a:avLst/>
-          </a:prstGeom>
-          <a:noFill/>
-          <a:ln>
-            <a:noFill/>
-          </a:ln>
-        </p:spPr>
-        <p:txBody>
-          <a:bodyPr spcFirstLastPara="1" wrap="square" lIns="0" tIns="0" rIns="0" bIns="0" anchor="t" anchorCtr="0">
-            <a:spAutoFit/>
-          </a:bodyPr>
-          <a:lstStyle/>
-          <a:p>
-            <a:pPr marL="0" marR="0" lvl="0" indent="0" algn="l" rtl="0">
-              <a:spcBef>
-                <a:spcPts val="0"/>
-              </a:spcBef>
-              <a:spcAft>
-                <a:spcPts val="0"/>
-              </a:spcAft>
-              <a:buNone/>
-            </a:pPr>
-            <a:r>
-              <a:rPr lang="en-US" sz="2250" b="1" i="0" u="none" strike="noStrike" cap="none">
-                <a:solidFill>
-                  <a:srgbClr val="38BDF8"/>
-                </a:solidFill>
-                <a:latin typeface="Poppins"/>
-                <a:ea typeface="Poppins"/>
-                <a:cs typeface="Poppins"/>
-                <a:sym typeface="Poppins"/>
-              </a:rPr>
-              <a:t>UI State &amp; Rotation</a:t>
-            </a:r>
-            <a:endParaRPr/>
-          </a:p>
-        </p:txBody>
-      </p:sp>
-      <p:sp>
-        <p:nvSpPr>
-          <p:cNvPr id="241" name="Google Shape;241;p21"/>
-          <p:cNvSpPr txBox="1"/>
-          <p:nvPr/>
-        </p:nvSpPr>
-        <p:spPr>
-          <a:xfrm>
-            <a:off x="1009650" y="2996654"/>
-            <a:ext cx="4740592" cy="314325"/>
-          </a:xfrm>
-          <a:prstGeom prst="rect">
-            <a:avLst/>
-          </a:prstGeom>
-          <a:noFill/>
-          <a:ln>
-            <a:noFill/>
-          </a:ln>
-        </p:spPr>
-        <p:txBody>
-          <a:bodyPr spcFirstLastPara="1" wrap="square" lIns="0" tIns="0" rIns="0" bIns="0" anchor="t" anchorCtr="0">
-            <a:spAutoFit/>
-          </a:bodyPr>
-          <a:lstStyle/>
-          <a:p>
-            <a:pPr marL="0" marR="0" lvl="0" indent="0" algn="l" rtl="0">
-              <a:spcBef>
-                <a:spcPts val="0"/>
-              </a:spcBef>
-              <a:spcAft>
-                <a:spcPts val="0"/>
-              </a:spcAft>
-              <a:buNone/>
-            </a:pPr>
-            <a:r>
-              <a:rPr lang="en-US" sz="1650" b="1" i="0" u="none" strike="noStrike" cap="none">
-                <a:solidFill>
-                  <a:srgbClr val="F8FAFC"/>
-                </a:solidFill>
-                <a:latin typeface="Poppins"/>
-                <a:ea typeface="Poppins"/>
-                <a:cs typeface="Poppins"/>
-                <a:sym typeface="Poppins"/>
-              </a:rPr>
-              <a:t>The Challenge:</a:t>
-            </a:r>
-            <a:endParaRPr/>
-          </a:p>
-        </p:txBody>
-      </p:sp>
-      <p:sp>
-        <p:nvSpPr>
-          <p:cNvPr id="242" name="Google Shape;242;p21"/>
-          <p:cNvSpPr txBox="1"/>
-          <p:nvPr/>
-        </p:nvSpPr>
-        <p:spPr>
-          <a:xfrm>
-            <a:off x="1009650" y="3406229"/>
-            <a:ext cx="4514850" cy="822870"/>
-          </a:xfrm>
-          <a:prstGeom prst="rect">
-            <a:avLst/>
-          </a:prstGeom>
-          <a:noFill/>
-          <a:ln>
-            <a:noFill/>
-          </a:ln>
-        </p:spPr>
-        <p:txBody>
-          <a:bodyPr spcFirstLastPara="1" wrap="square" lIns="0" tIns="0" rIns="0" bIns="0" anchor="t" anchorCtr="0">
-            <a:spAutoFit/>
-          </a:bodyPr>
-          <a:lstStyle/>
-          <a:p>
-            <a:pPr marL="0" marR="0" lvl="0" indent="0" algn="l" rtl="0">
-              <a:lnSpc>
-                <a:spcPct val="160000"/>
-              </a:lnSpc>
-              <a:spcBef>
-                <a:spcPts val="0"/>
-              </a:spcBef>
-              <a:spcAft>
-                <a:spcPts val="0"/>
-              </a:spcAft>
-              <a:buNone/>
-            </a:pPr>
-            <a:r>
-              <a:rPr lang="en-US" sz="1350" b="0" i="0" u="none" strike="noStrike" cap="none">
-                <a:solidFill>
-                  <a:srgbClr val="CBD5E1"/>
-                </a:solidFill>
-                <a:latin typeface="Inter"/>
-                <a:ea typeface="Inter"/>
-                <a:cs typeface="Inter"/>
-                <a:sym typeface="Inter"/>
-              </a:rPr>
-              <a:t>Handling configuration changes (like device rotation) seamlessly without losing fetched data or causing redundant, expensive API calls.</a:t>
-            </a:r>
-            <a:endParaRPr/>
-          </a:p>
-        </p:txBody>
-      </p:sp>
-      <p:sp>
-        <p:nvSpPr>
-          <p:cNvPr id="243" name="Google Shape;243;p21"/>
-          <p:cNvSpPr txBox="1"/>
-          <p:nvPr/>
-        </p:nvSpPr>
-        <p:spPr>
-          <a:xfrm>
-            <a:off x="1009650" y="4467225"/>
-            <a:ext cx="4740592" cy="314325"/>
-          </a:xfrm>
-          <a:prstGeom prst="rect">
-            <a:avLst/>
-          </a:prstGeom>
-          <a:noFill/>
-          <a:ln>
-            <a:noFill/>
-          </a:ln>
-        </p:spPr>
-        <p:txBody>
-          <a:bodyPr spcFirstLastPara="1" wrap="square" lIns="0" tIns="0" rIns="0" bIns="0" anchor="t" anchorCtr="0">
-            <a:spAutoFit/>
-          </a:bodyPr>
-          <a:lstStyle/>
-          <a:p>
-            <a:pPr marL="0" marR="0" lvl="0" indent="0" algn="l" rtl="0">
-              <a:spcBef>
-                <a:spcPts val="0"/>
-              </a:spcBef>
-              <a:spcAft>
-                <a:spcPts val="0"/>
-              </a:spcAft>
-              <a:buNone/>
-            </a:pPr>
-            <a:r>
-              <a:rPr lang="en-US" sz="1650" b="1" i="0" u="none" strike="noStrike" cap="none">
-                <a:solidFill>
-                  <a:srgbClr val="F8FAFC"/>
-                </a:solidFill>
-                <a:latin typeface="Poppins"/>
-                <a:ea typeface="Poppins"/>
-                <a:cs typeface="Poppins"/>
-                <a:sym typeface="Poppins"/>
-              </a:rPr>
-              <a:t>The Solution:</a:t>
-            </a:r>
-            <a:endParaRPr/>
-          </a:p>
-        </p:txBody>
-      </p:sp>
-      <p:sp>
-        <p:nvSpPr>
-          <p:cNvPr id="244" name="Google Shape;244;p21"/>
-          <p:cNvSpPr txBox="1"/>
-          <p:nvPr/>
-        </p:nvSpPr>
-        <p:spPr>
-          <a:xfrm>
-            <a:off x="1009650" y="4876800"/>
-            <a:ext cx="4514850" cy="822870"/>
-          </a:xfrm>
-          <a:prstGeom prst="rect">
-            <a:avLst/>
-          </a:prstGeom>
-          <a:noFill/>
-          <a:ln>
-            <a:noFill/>
-          </a:ln>
-        </p:spPr>
-        <p:txBody>
-          <a:bodyPr spcFirstLastPara="1" wrap="square" lIns="0" tIns="0" rIns="0" bIns="0" anchor="t" anchorCtr="0">
-            <a:spAutoFit/>
-          </a:bodyPr>
-          <a:lstStyle/>
-          <a:p>
-            <a:pPr marL="0" marR="0" lvl="0" indent="0" algn="l" rtl="0">
-              <a:lnSpc>
-                <a:spcPct val="160000"/>
-              </a:lnSpc>
-              <a:spcBef>
-                <a:spcPts val="0"/>
-              </a:spcBef>
-              <a:spcAft>
-                <a:spcPts val="0"/>
-              </a:spcAft>
-              <a:buNone/>
-            </a:pPr>
-            <a:r>
-              <a:rPr lang="en-US" sz="1350" b="0" i="0" u="none" strike="noStrike" cap="none">
-                <a:solidFill>
-                  <a:srgbClr val="CBD5E1"/>
-                </a:solidFill>
-                <a:latin typeface="Inter"/>
-                <a:ea typeface="Inter"/>
-                <a:cs typeface="Inter"/>
-                <a:sym typeface="Inter"/>
-              </a:rPr>
-              <a:t>Implemented architecture strictly using </a:t>
-            </a:r>
-            <a:r>
-              <a:rPr lang="en-US" sz="1350" b="1" i="0" u="none" strike="noStrike" cap="none">
-                <a:solidFill>
-                  <a:srgbClr val="CBD5E1"/>
-                </a:solidFill>
-                <a:latin typeface="Inter"/>
-                <a:ea typeface="Inter"/>
-                <a:cs typeface="Inter"/>
-                <a:sym typeface="Inter"/>
-              </a:rPr>
-              <a:t>ViewModel</a:t>
-            </a:r>
-            <a:r>
-              <a:rPr lang="en-US" sz="1350" b="0" i="0" u="none" strike="noStrike" cap="none">
-                <a:solidFill>
-                  <a:srgbClr val="CBD5E1"/>
-                </a:solidFill>
-                <a:latin typeface="Inter"/>
-                <a:ea typeface="Inter"/>
-                <a:cs typeface="Inter"/>
-                <a:sym typeface="Inter"/>
-              </a:rPr>
-              <a:t> and </a:t>
-            </a:r>
-            <a:r>
-              <a:rPr lang="en-US" sz="1350" b="1" i="0" u="none" strike="noStrike" cap="none">
-                <a:solidFill>
-                  <a:srgbClr val="CBD5E1"/>
-                </a:solidFill>
-                <a:latin typeface="Inter"/>
-                <a:ea typeface="Inter"/>
-                <a:cs typeface="Inter"/>
-                <a:sym typeface="Inter"/>
-              </a:rPr>
-              <a:t>LiveData/StateFlow</a:t>
-            </a:r>
-            <a:r>
-              <a:rPr lang="en-US" sz="1350" b="0" i="0" u="none" strike="noStrike" cap="none">
-                <a:solidFill>
-                  <a:srgbClr val="CBD5E1"/>
-                </a:solidFill>
-                <a:latin typeface="Inter"/>
-                <a:ea typeface="Inter"/>
-                <a:cs typeface="Inter"/>
-                <a:sym typeface="Inter"/>
-              </a:rPr>
-              <a:t> to persist UI state cleanly across the entire lifecycle.</a:t>
-            </a:r>
-            <a:endParaRPr/>
-          </a:p>
-        </p:txBody>
-      </p:sp>
-      <p:sp>
-        <p:nvSpPr>
-          <p:cNvPr id="245" name="Google Shape;245;p21"/>
-          <p:cNvSpPr txBox="1"/>
-          <p:nvPr/>
-        </p:nvSpPr>
-        <p:spPr>
-          <a:xfrm>
-            <a:off x="6724650" y="2320379"/>
-            <a:ext cx="4740592" cy="438150"/>
-          </a:xfrm>
-          <a:prstGeom prst="rect">
-            <a:avLst/>
-          </a:prstGeom>
-          <a:noFill/>
-          <a:ln>
-            <a:noFill/>
-          </a:ln>
-        </p:spPr>
-        <p:txBody>
-          <a:bodyPr spcFirstLastPara="1" wrap="square" lIns="0" tIns="0" rIns="0" bIns="0" anchor="t" anchorCtr="0">
-            <a:spAutoFit/>
-          </a:bodyPr>
-          <a:lstStyle/>
-          <a:p>
-            <a:pPr marL="0" marR="0" lvl="0" indent="0" algn="l" rtl="0">
-              <a:spcBef>
-                <a:spcPts val="0"/>
-              </a:spcBef>
-              <a:spcAft>
-                <a:spcPts val="0"/>
-              </a:spcAft>
-              <a:buNone/>
-            </a:pPr>
-            <a:r>
-              <a:rPr lang="en-US" sz="2250" b="1" i="0" u="none" strike="noStrike" cap="none">
-                <a:solidFill>
-                  <a:srgbClr val="38BDF8"/>
-                </a:solidFill>
-                <a:latin typeface="Poppins"/>
-                <a:ea typeface="Poppins"/>
-                <a:cs typeface="Poppins"/>
-                <a:sym typeface="Poppins"/>
-              </a:rPr>
-              <a:t>Network Resiliency</a:t>
-            </a:r>
-            <a:endParaRPr/>
-          </a:p>
-        </p:txBody>
-      </p:sp>
-      <p:sp>
-        <p:nvSpPr>
-          <p:cNvPr id="246" name="Google Shape;246;p21"/>
-          <p:cNvSpPr txBox="1"/>
-          <p:nvPr/>
-        </p:nvSpPr>
-        <p:spPr>
-          <a:xfrm>
-            <a:off x="6724650" y="2996654"/>
-            <a:ext cx="4740592" cy="314325"/>
-          </a:xfrm>
-          <a:prstGeom prst="rect">
-            <a:avLst/>
-          </a:prstGeom>
-          <a:noFill/>
-          <a:ln>
-            <a:noFill/>
-          </a:ln>
-        </p:spPr>
-        <p:txBody>
-          <a:bodyPr spcFirstLastPara="1" wrap="square" lIns="0" tIns="0" rIns="0" bIns="0" anchor="t" anchorCtr="0">
-            <a:spAutoFit/>
-          </a:bodyPr>
-          <a:lstStyle/>
-          <a:p>
-            <a:pPr marL="0" marR="0" lvl="0" indent="0" algn="l" rtl="0">
-              <a:spcBef>
-                <a:spcPts val="0"/>
-              </a:spcBef>
-              <a:spcAft>
-                <a:spcPts val="0"/>
-              </a:spcAft>
-              <a:buNone/>
-            </a:pPr>
-            <a:r>
-              <a:rPr lang="en-US" sz="1650" b="1" i="0" u="none" strike="noStrike" cap="none">
-                <a:solidFill>
-                  <a:srgbClr val="F8FAFC"/>
-                </a:solidFill>
-                <a:latin typeface="Poppins"/>
-                <a:ea typeface="Poppins"/>
-                <a:cs typeface="Poppins"/>
-                <a:sym typeface="Poppins"/>
-              </a:rPr>
-              <a:t>The Challenge:</a:t>
-            </a:r>
-            <a:endParaRPr/>
-          </a:p>
-        </p:txBody>
-      </p:sp>
-      <p:sp>
-        <p:nvSpPr>
-          <p:cNvPr id="247" name="Google Shape;247;p21"/>
-          <p:cNvSpPr txBox="1"/>
-          <p:nvPr/>
-        </p:nvSpPr>
-        <p:spPr>
-          <a:xfrm>
-            <a:off x="6724650" y="3406229"/>
-            <a:ext cx="4514850" cy="822870"/>
-          </a:xfrm>
-          <a:prstGeom prst="rect">
-            <a:avLst/>
-          </a:prstGeom>
-          <a:noFill/>
-          <a:ln>
-            <a:noFill/>
-          </a:ln>
-        </p:spPr>
-        <p:txBody>
-          <a:bodyPr spcFirstLastPara="1" wrap="square" lIns="0" tIns="0" rIns="0" bIns="0" anchor="t" anchorCtr="0">
-            <a:spAutoFit/>
-          </a:bodyPr>
-          <a:lstStyle/>
-          <a:p>
-            <a:pPr marL="0" marR="0" lvl="0" indent="0" algn="l" rtl="0">
-              <a:lnSpc>
-                <a:spcPct val="160000"/>
-              </a:lnSpc>
-              <a:spcBef>
-                <a:spcPts val="0"/>
-              </a:spcBef>
-              <a:spcAft>
-                <a:spcPts val="0"/>
-              </a:spcAft>
-              <a:buNone/>
-            </a:pPr>
-            <a:r>
-              <a:rPr lang="en-US" sz="1350" b="0" i="0" u="none" strike="noStrike" cap="none">
-                <a:solidFill>
-                  <a:srgbClr val="CBD5E1"/>
-                </a:solidFill>
-                <a:latin typeface="Inter"/>
-                <a:ea typeface="Inter"/>
-                <a:cs typeface="Inter"/>
-                <a:sym typeface="Inter"/>
-              </a:rPr>
-              <a:t>Dealing with strict API Rate limits from OpenWeatherMap and maintaining full application usability when the device is completely offline.</a:t>
-            </a:r>
-            <a:endParaRPr/>
-          </a:p>
-        </p:txBody>
-      </p:sp>
-      <p:sp>
-        <p:nvSpPr>
-          <p:cNvPr id="248" name="Google Shape;248;p21"/>
-          <p:cNvSpPr txBox="1"/>
-          <p:nvPr/>
-        </p:nvSpPr>
-        <p:spPr>
-          <a:xfrm>
-            <a:off x="6724650" y="4467225"/>
-            <a:ext cx="4740592" cy="314325"/>
-          </a:xfrm>
-          <a:prstGeom prst="rect">
-            <a:avLst/>
-          </a:prstGeom>
-          <a:noFill/>
-          <a:ln>
-            <a:noFill/>
-          </a:ln>
-        </p:spPr>
-        <p:txBody>
-          <a:bodyPr spcFirstLastPara="1" wrap="square" lIns="0" tIns="0" rIns="0" bIns="0" anchor="t" anchorCtr="0">
-            <a:spAutoFit/>
-          </a:bodyPr>
-          <a:lstStyle/>
-          <a:p>
-            <a:pPr marL="0" marR="0" lvl="0" indent="0" algn="l" rtl="0">
-              <a:spcBef>
-                <a:spcPts val="0"/>
-              </a:spcBef>
-              <a:spcAft>
-                <a:spcPts val="0"/>
-              </a:spcAft>
-              <a:buNone/>
-            </a:pPr>
-            <a:r>
-              <a:rPr lang="en-US" sz="1650" b="1" i="0" u="none" strike="noStrike" cap="none">
-                <a:solidFill>
-                  <a:srgbClr val="F8FAFC"/>
-                </a:solidFill>
-                <a:latin typeface="Poppins"/>
-                <a:ea typeface="Poppins"/>
-                <a:cs typeface="Poppins"/>
-                <a:sym typeface="Poppins"/>
-              </a:rPr>
-              <a:t>The Solution:</a:t>
-            </a:r>
-            <a:endParaRPr/>
-          </a:p>
-        </p:txBody>
-      </p:sp>
-      <p:sp>
-        <p:nvSpPr>
-          <p:cNvPr id="249" name="Google Shape;249;p21"/>
-          <p:cNvSpPr txBox="1"/>
-          <p:nvPr/>
-        </p:nvSpPr>
-        <p:spPr>
-          <a:xfrm>
-            <a:off x="6724650" y="4876800"/>
-            <a:ext cx="4514850" cy="822870"/>
-          </a:xfrm>
-          <a:prstGeom prst="rect">
-            <a:avLst/>
-          </a:prstGeom>
-          <a:noFill/>
-          <a:ln>
-            <a:noFill/>
-          </a:ln>
-        </p:spPr>
-        <p:txBody>
-          <a:bodyPr spcFirstLastPara="1" wrap="square" lIns="0" tIns="0" rIns="0" bIns="0" anchor="t" anchorCtr="0">
-            <a:spAutoFit/>
-          </a:bodyPr>
-          <a:lstStyle/>
-          <a:p>
-            <a:pPr marL="0" marR="0" lvl="0" indent="0" algn="l" rtl="0">
-              <a:lnSpc>
-                <a:spcPct val="160000"/>
-              </a:lnSpc>
-              <a:spcBef>
-                <a:spcPts val="0"/>
-              </a:spcBef>
-              <a:spcAft>
-                <a:spcPts val="0"/>
-              </a:spcAft>
-              <a:buNone/>
-            </a:pPr>
-            <a:r>
-              <a:rPr lang="en-US" sz="1350" b="0" i="0" u="none" strike="noStrike" cap="none">
-                <a:solidFill>
-                  <a:srgbClr val="CBD5E1"/>
-                </a:solidFill>
-                <a:latin typeface="Inter"/>
-                <a:ea typeface="Inter"/>
-                <a:cs typeface="Inter"/>
-                <a:sym typeface="Inter"/>
-              </a:rPr>
-              <a:t>Engineered a robust </a:t>
-            </a:r>
-            <a:r>
-              <a:rPr lang="en-US" sz="1350" b="1" i="0" u="none" strike="noStrike" cap="none">
-                <a:solidFill>
-                  <a:srgbClr val="CBD5E1"/>
-                </a:solidFill>
-                <a:latin typeface="Inter"/>
-                <a:ea typeface="Inter"/>
-                <a:cs typeface="Inter"/>
-                <a:sym typeface="Inter"/>
-              </a:rPr>
-              <a:t>Room Database</a:t>
-            </a:r>
-            <a:r>
-              <a:rPr lang="en-US" sz="1350" b="0" i="0" u="none" strike="noStrike" cap="none">
-                <a:solidFill>
-                  <a:srgbClr val="CBD5E1"/>
-                </a:solidFill>
-                <a:latin typeface="Inter"/>
-                <a:ea typeface="Inter"/>
-                <a:cs typeface="Inter"/>
-                <a:sym typeface="Inter"/>
-              </a:rPr>
-              <a:t> cache layer. The app acts offline-first, loading local data immediately while silently syncing via network.</a:t>
-            </a:r>
-            <a:endParaRPr/>
-          </a:p>
-        </p:txBody>
-      </p:sp>
     </p:spTree>
   </p:cSld>
   <p:clrMapOvr>
